--- a/260418_add/supplefigure_260420/SuppFig_S03_CNV_HRD.pptx
+++ b/260418_add/supplefigure_260420/SuppFig_S03_CNV_HRD.pptx
@@ -3157,7 +3157,7 @@
                 </a:solidFill>
                 <a:latin typeface="Arial"/>
               </a:rPr>
-              <a:t>HRD-sum components per subject (LST + LOH + TAI, Myriad-style proxy; pre-CRT)</a:t>
+              <a:t>HRD-sum components per subject (LST + LOH + TAI; Myriad-style proxy)</a:t>
             </a:r>
           </a:p>
         </p:txBody>
@@ -3445,7 +3445,7 @@
                 </a:solidFill>
                 <a:latin typeface="Arial"/>
               </a:rPr>
-              <a:t>8</a:t>
+              <a:t>9</a:t>
             </a:r>
           </a:p>
         </p:txBody>
@@ -3517,7 +3517,7 @@
                 </a:solidFill>
                 <a:latin typeface="Arial"/>
               </a:rPr>
-              <a:t>16</a:t>
+              <a:t>18</a:t>
             </a:r>
           </a:p>
         </p:txBody>
@@ -3589,7 +3589,7 @@
                 </a:solidFill>
                 <a:latin typeface="Arial"/>
               </a:rPr>
-              <a:t>24</a:t>
+              <a:t>27</a:t>
             </a:r>
           </a:p>
         </p:txBody>
@@ -3661,7 +3661,7 @@
                 </a:solidFill>
                 <a:latin typeface="Arial"/>
               </a:rPr>
-              <a:t>32</a:t>
+              <a:t>36</a:t>
             </a:r>
           </a:p>
         </p:txBody>
@@ -3733,7 +3733,7 @@
                 </a:solidFill>
                 <a:latin typeface="Arial"/>
               </a:rPr>
-              <a:t>40</a:t>
+              <a:t>45</a:t>
             </a:r>
           </a:p>
         </p:txBody>
@@ -3774,16 +3774,89 @@
           </a:p>
         </p:txBody>
       </p:sp>
-      <p:sp>
-        <p:nvSpPr>
-          <p:cNvPr id="21" name="Rectangle 20"/>
-          <p:cNvSpPr/>
-          <p:nvPr/>
-        </p:nvSpPr>
-        <p:spPr>
-          <a:xfrm>
-            <a:off x="1217930" y="5529811"/>
-            <a:ext cx="233680" cy="230909"/>
+      <p:cxnSp>
+        <p:nvCxnSpPr>
+          <p:cNvPr id="21" name="Connector 20"/>
+          <p:cNvCxnSpPr/>
+          <p:nvPr/>
+        </p:nvCxnSpPr>
+        <p:spPr>
+          <a:xfrm>
+            <a:off x="1188720" y="1493520"/>
+            <a:ext cx="10515600" cy="0"/>
+          </a:xfrm>
+          <a:prstGeom prst="line">
+            <a:avLst/>
+          </a:prstGeom>
+          <a:ln w="19050">
+            <a:solidFill>
+              <a:srgbClr val="D4A300"/>
+            </a:solidFill>
+            <a:prstDash val="dash"/>
+          </a:ln>
+          <a:effectLst/>
+        </p:spPr>
+        <p:style>
+          <a:lnRef idx="2">
+            <a:schemeClr val="accent1"/>
+          </a:lnRef>
+          <a:fillRef idx="0">
+            <a:schemeClr val="accent1"/>
+          </a:fillRef>
+          <a:effectRef idx="1">
+            <a:schemeClr val="accent1"/>
+          </a:effectRef>
+          <a:fontRef idx="minor">
+            <a:schemeClr val="tx1"/>
+          </a:fontRef>
+        </p:style>
+      </p:cxnSp>
+      <p:sp>
+        <p:nvSpPr>
+          <p:cNvPr id="22" name="TextBox 21"/>
+          <p:cNvSpPr txBox="1"/>
+          <p:nvPr/>
+        </p:nvSpPr>
+        <p:spPr>
+          <a:xfrm>
+            <a:off x="11750040" y="1402080"/>
+            <a:ext cx="1371600" cy="182880"/>
+          </a:xfrm>
+          <a:prstGeom prst="rect">
+            <a:avLst/>
+          </a:prstGeom>
+          <a:noFill/>
+          <a:effectLst/>
+        </p:spPr>
+        <p:txBody>
+          <a:bodyPr wrap="square" lIns="0" rIns="0" tIns="0" bIns="0" anchor="ctr">
+            <a:spAutoFit/>
+          </a:bodyPr>
+          <a:lstStyle/>
+          <a:p>
+            <a:pPr algn="l"/>
+            <a:r>
+              <a:rPr sz="800" b="1" i="0">
+                <a:solidFill>
+                  <a:srgbClr val="D4A300"/>
+                </a:solidFill>
+                <a:latin typeface="Arial"/>
+              </a:rPr>
+              <a:t>Myriad HRD-42 threshold</a:t>
+            </a:r>
+          </a:p>
+        </p:txBody>
+      </p:sp>
+      <p:sp>
+        <p:nvSpPr>
+          <p:cNvPr id="23" name="Rectangle 22"/>
+          <p:cNvSpPr/>
+          <p:nvPr/>
+        </p:nvSpPr>
+        <p:spPr>
+          <a:xfrm>
+            <a:off x="1217930" y="5557520"/>
+            <a:ext cx="233680" cy="203200"/>
           </a:xfrm>
           <a:prstGeom prst="rect">
             <a:avLst/>
@@ -3822,14 +3895,14 @@
       </p:sp>
       <p:sp>
         <p:nvSpPr>
-          <p:cNvPr id="22" name="Rectangle 21"/>
-          <p:cNvSpPr/>
-          <p:nvPr/>
-        </p:nvSpPr>
-        <p:spPr>
-          <a:xfrm>
-            <a:off x="1217930" y="5414356"/>
-            <a:ext cx="233680" cy="115455"/>
+          <p:cNvPr id="24" name="Rectangle 23"/>
+          <p:cNvSpPr/>
+          <p:nvPr/>
+        </p:nvSpPr>
+        <p:spPr>
+          <a:xfrm>
+            <a:off x="1217930" y="5455920"/>
+            <a:ext cx="233680" cy="101600"/>
           </a:xfrm>
           <a:prstGeom prst="rect">
             <a:avLst/>
@@ -3868,14 +3941,14 @@
       </p:sp>
       <p:sp>
         <p:nvSpPr>
-          <p:cNvPr id="23" name="Rectangle 22"/>
-          <p:cNvSpPr/>
-          <p:nvPr/>
-        </p:nvSpPr>
-        <p:spPr>
-          <a:xfrm>
-            <a:off x="1217930" y="4837084"/>
-            <a:ext cx="233680" cy="577273"/>
+          <p:cNvPr id="25" name="Rectangle 24"/>
+          <p:cNvSpPr/>
+          <p:nvPr/>
+        </p:nvSpPr>
+        <p:spPr>
+          <a:xfrm>
+            <a:off x="1217930" y="4947920"/>
+            <a:ext cx="233680" cy="508000"/>
           </a:xfrm>
           <a:prstGeom prst="rect">
             <a:avLst/>
@@ -3914,7 +3987,7 @@
       </p:sp>
       <p:sp>
         <p:nvSpPr>
-          <p:cNvPr id="24" name="Rectangle 23"/>
+          <p:cNvPr id="26" name="Rectangle 25"/>
           <p:cNvSpPr/>
           <p:nvPr/>
         </p:nvSpPr>
@@ -3958,7 +4031,7 @@
       </p:sp>
       <p:sp>
         <p:nvSpPr>
-          <p:cNvPr id="25" name="TextBox 24"/>
+          <p:cNvPr id="27" name="TextBox 26"/>
           <p:cNvSpPr txBox="1"/>
           <p:nvPr/>
         </p:nvSpPr>
@@ -3994,14 +4067,14 @@
       </p:sp>
       <p:sp>
         <p:nvSpPr>
-          <p:cNvPr id="26" name="Rectangle 25"/>
-          <p:cNvSpPr/>
-          <p:nvPr/>
-        </p:nvSpPr>
-        <p:spPr>
-          <a:xfrm>
-            <a:off x="1510030" y="5298902"/>
-            <a:ext cx="233680" cy="461818"/>
+          <p:cNvPr id="28" name="Rectangle 27"/>
+          <p:cNvSpPr/>
+          <p:nvPr/>
+        </p:nvSpPr>
+        <p:spPr>
+          <a:xfrm>
+            <a:off x="1510030" y="5354320"/>
+            <a:ext cx="233680" cy="406400"/>
           </a:xfrm>
           <a:prstGeom prst="rect">
             <a:avLst/>
@@ -4040,14 +4113,14 @@
       </p:sp>
       <p:sp>
         <p:nvSpPr>
-          <p:cNvPr id="27" name="Rectangle 26"/>
-          <p:cNvSpPr/>
-          <p:nvPr/>
-        </p:nvSpPr>
-        <p:spPr>
-          <a:xfrm>
-            <a:off x="1510030" y="5067993"/>
-            <a:ext cx="233680" cy="230909"/>
+          <p:cNvPr id="29" name="Rectangle 28"/>
+          <p:cNvSpPr/>
+          <p:nvPr/>
+        </p:nvSpPr>
+        <p:spPr>
+          <a:xfrm>
+            <a:off x="1510030" y="5151120"/>
+            <a:ext cx="233680" cy="203200"/>
           </a:xfrm>
           <a:prstGeom prst="rect">
             <a:avLst/>
@@ -4086,14 +4159,14 @@
       </p:sp>
       <p:sp>
         <p:nvSpPr>
-          <p:cNvPr id="28" name="Rectangle 27"/>
-          <p:cNvSpPr/>
-          <p:nvPr/>
-        </p:nvSpPr>
-        <p:spPr>
-          <a:xfrm>
-            <a:off x="1510030" y="4490720"/>
-            <a:ext cx="233680" cy="577273"/>
+          <p:cNvPr id="30" name="Rectangle 29"/>
+          <p:cNvSpPr/>
+          <p:nvPr/>
+        </p:nvSpPr>
+        <p:spPr>
+          <a:xfrm>
+            <a:off x="1510030" y="4643120"/>
+            <a:ext cx="233680" cy="508000"/>
           </a:xfrm>
           <a:prstGeom prst="rect">
             <a:avLst/>
@@ -4132,7 +4205,7 @@
       </p:sp>
       <p:sp>
         <p:nvSpPr>
-          <p:cNvPr id="29" name="Rectangle 28"/>
+          <p:cNvPr id="31" name="Rectangle 30"/>
           <p:cNvSpPr/>
           <p:nvPr/>
         </p:nvSpPr>
@@ -4176,7 +4249,7 @@
       </p:sp>
       <p:sp>
         <p:nvSpPr>
-          <p:cNvPr id="30" name="TextBox 29"/>
+          <p:cNvPr id="32" name="TextBox 31"/>
           <p:cNvSpPr txBox="1"/>
           <p:nvPr/>
         </p:nvSpPr>
@@ -4212,14 +4285,14 @@
       </p:sp>
       <p:sp>
         <p:nvSpPr>
-          <p:cNvPr id="31" name="Rectangle 30"/>
-          <p:cNvSpPr/>
-          <p:nvPr/>
-        </p:nvSpPr>
-        <p:spPr>
-          <a:xfrm>
-            <a:off x="1802130" y="5414356"/>
-            <a:ext cx="233680" cy="346364"/>
+          <p:cNvPr id="33" name="Rectangle 32"/>
+          <p:cNvSpPr/>
+          <p:nvPr/>
+        </p:nvSpPr>
+        <p:spPr>
+          <a:xfrm>
+            <a:off x="1802130" y="5455920"/>
+            <a:ext cx="233680" cy="304800"/>
           </a:xfrm>
           <a:prstGeom prst="rect">
             <a:avLst/>
@@ -4258,14 +4331,14 @@
       </p:sp>
       <p:sp>
         <p:nvSpPr>
-          <p:cNvPr id="32" name="Rectangle 31"/>
-          <p:cNvSpPr/>
-          <p:nvPr/>
-        </p:nvSpPr>
-        <p:spPr>
-          <a:xfrm>
-            <a:off x="1802130" y="4952538"/>
-            <a:ext cx="233680" cy="461818"/>
+          <p:cNvPr id="34" name="Rectangle 33"/>
+          <p:cNvSpPr/>
+          <p:nvPr/>
+        </p:nvSpPr>
+        <p:spPr>
+          <a:xfrm>
+            <a:off x="1802130" y="5049520"/>
+            <a:ext cx="233680" cy="406400"/>
           </a:xfrm>
           <a:prstGeom prst="rect">
             <a:avLst/>
@@ -4304,14 +4377,14 @@
       </p:sp>
       <p:sp>
         <p:nvSpPr>
-          <p:cNvPr id="33" name="Rectangle 32"/>
-          <p:cNvSpPr/>
-          <p:nvPr/>
-        </p:nvSpPr>
-        <p:spPr>
-          <a:xfrm>
-            <a:off x="1802130" y="4375265"/>
-            <a:ext cx="233680" cy="577273"/>
+          <p:cNvPr id="35" name="Rectangle 34"/>
+          <p:cNvSpPr/>
+          <p:nvPr/>
+        </p:nvSpPr>
+        <p:spPr>
+          <a:xfrm>
+            <a:off x="1802130" y="4541520"/>
+            <a:ext cx="233680" cy="508000"/>
           </a:xfrm>
           <a:prstGeom prst="rect">
             <a:avLst/>
@@ -4350,7 +4423,7 @@
       </p:sp>
       <p:sp>
         <p:nvSpPr>
-          <p:cNvPr id="34" name="Rectangle 33"/>
+          <p:cNvPr id="36" name="Rectangle 35"/>
           <p:cNvSpPr/>
           <p:nvPr/>
         </p:nvSpPr>
@@ -4394,7 +4467,7 @@
       </p:sp>
       <p:sp>
         <p:nvSpPr>
-          <p:cNvPr id="35" name="TextBox 34"/>
+          <p:cNvPr id="37" name="TextBox 36"/>
           <p:cNvSpPr txBox="1"/>
           <p:nvPr/>
         </p:nvSpPr>
@@ -4430,14 +4503,14 @@
       </p:sp>
       <p:sp>
         <p:nvSpPr>
-          <p:cNvPr id="36" name="Rectangle 35"/>
-          <p:cNvSpPr/>
-          <p:nvPr/>
-        </p:nvSpPr>
-        <p:spPr>
-          <a:xfrm>
-            <a:off x="2094230" y="5414356"/>
-            <a:ext cx="233680" cy="346364"/>
+          <p:cNvPr id="38" name="Rectangle 37"/>
+          <p:cNvSpPr/>
+          <p:nvPr/>
+        </p:nvSpPr>
+        <p:spPr>
+          <a:xfrm>
+            <a:off x="2094230" y="5455920"/>
+            <a:ext cx="233680" cy="304800"/>
           </a:xfrm>
           <a:prstGeom prst="rect">
             <a:avLst/>
@@ -4476,14 +4549,14 @@
       </p:sp>
       <p:sp>
         <p:nvSpPr>
-          <p:cNvPr id="37" name="Rectangle 36"/>
-          <p:cNvSpPr/>
-          <p:nvPr/>
-        </p:nvSpPr>
-        <p:spPr>
-          <a:xfrm>
-            <a:off x="2094230" y="5067993"/>
-            <a:ext cx="233680" cy="346364"/>
+          <p:cNvPr id="39" name="Rectangle 38"/>
+          <p:cNvSpPr/>
+          <p:nvPr/>
+        </p:nvSpPr>
+        <p:spPr>
+          <a:xfrm>
+            <a:off x="2094230" y="5151120"/>
+            <a:ext cx="233680" cy="304800"/>
           </a:xfrm>
           <a:prstGeom prst="rect">
             <a:avLst/>
@@ -4522,14 +4595,14 @@
       </p:sp>
       <p:sp>
         <p:nvSpPr>
-          <p:cNvPr id="38" name="Rectangle 37"/>
-          <p:cNvSpPr/>
-          <p:nvPr/>
-        </p:nvSpPr>
-        <p:spPr>
-          <a:xfrm>
-            <a:off x="2094230" y="4375265"/>
-            <a:ext cx="233680" cy="692727"/>
+          <p:cNvPr id="40" name="Rectangle 39"/>
+          <p:cNvSpPr/>
+          <p:nvPr/>
+        </p:nvSpPr>
+        <p:spPr>
+          <a:xfrm>
+            <a:off x="2094230" y="4541520"/>
+            <a:ext cx="233680" cy="609600"/>
           </a:xfrm>
           <a:prstGeom prst="rect">
             <a:avLst/>
@@ -4568,7 +4641,7 @@
       </p:sp>
       <p:sp>
         <p:nvSpPr>
-          <p:cNvPr id="39" name="Rectangle 38"/>
+          <p:cNvPr id="41" name="Rectangle 40"/>
           <p:cNvSpPr/>
           <p:nvPr/>
         </p:nvSpPr>
@@ -4612,7 +4685,7 @@
       </p:sp>
       <p:sp>
         <p:nvSpPr>
-          <p:cNvPr id="40" name="TextBox 39"/>
+          <p:cNvPr id="42" name="TextBox 41"/>
           <p:cNvSpPr txBox="1"/>
           <p:nvPr/>
         </p:nvSpPr>
@@ -4648,14 +4721,14 @@
       </p:sp>
       <p:sp>
         <p:nvSpPr>
-          <p:cNvPr id="41" name="Rectangle 40"/>
-          <p:cNvSpPr/>
-          <p:nvPr/>
-        </p:nvSpPr>
-        <p:spPr>
-          <a:xfrm>
-            <a:off x="2386330" y="5414356"/>
-            <a:ext cx="233680" cy="346364"/>
+          <p:cNvPr id="43" name="Rectangle 42"/>
+          <p:cNvSpPr/>
+          <p:nvPr/>
+        </p:nvSpPr>
+        <p:spPr>
+          <a:xfrm>
+            <a:off x="2386330" y="5455920"/>
+            <a:ext cx="233680" cy="304800"/>
           </a:xfrm>
           <a:prstGeom prst="rect">
             <a:avLst/>
@@ -4694,14 +4767,14 @@
       </p:sp>
       <p:sp>
         <p:nvSpPr>
-          <p:cNvPr id="42" name="Rectangle 41"/>
-          <p:cNvSpPr/>
-          <p:nvPr/>
-        </p:nvSpPr>
-        <p:spPr>
-          <a:xfrm>
-            <a:off x="2386330" y="4837084"/>
-            <a:ext cx="233680" cy="577273"/>
+          <p:cNvPr id="44" name="Rectangle 43"/>
+          <p:cNvSpPr/>
+          <p:nvPr/>
+        </p:nvSpPr>
+        <p:spPr>
+          <a:xfrm>
+            <a:off x="2386330" y="4947920"/>
+            <a:ext cx="233680" cy="508000"/>
           </a:xfrm>
           <a:prstGeom prst="rect">
             <a:avLst/>
@@ -4740,14 +4813,14 @@
       </p:sp>
       <p:sp>
         <p:nvSpPr>
-          <p:cNvPr id="43" name="Rectangle 42"/>
-          <p:cNvSpPr/>
-          <p:nvPr/>
-        </p:nvSpPr>
-        <p:spPr>
-          <a:xfrm>
-            <a:off x="2386330" y="4259811"/>
-            <a:ext cx="233680" cy="577273"/>
+          <p:cNvPr id="45" name="Rectangle 44"/>
+          <p:cNvSpPr/>
+          <p:nvPr/>
+        </p:nvSpPr>
+        <p:spPr>
+          <a:xfrm>
+            <a:off x="2386330" y="4439920"/>
+            <a:ext cx="233680" cy="508000"/>
           </a:xfrm>
           <a:prstGeom prst="rect">
             <a:avLst/>
@@ -4786,7 +4859,7 @@
       </p:sp>
       <p:sp>
         <p:nvSpPr>
-          <p:cNvPr id="44" name="Rectangle 43"/>
+          <p:cNvPr id="46" name="Rectangle 45"/>
           <p:cNvSpPr/>
           <p:nvPr/>
         </p:nvSpPr>
@@ -4830,7 +4903,7 @@
       </p:sp>
       <p:sp>
         <p:nvSpPr>
-          <p:cNvPr id="45" name="TextBox 44"/>
+          <p:cNvPr id="47" name="TextBox 46"/>
           <p:cNvSpPr txBox="1"/>
           <p:nvPr/>
         </p:nvSpPr>
@@ -4866,14 +4939,14 @@
       </p:sp>
       <p:sp>
         <p:nvSpPr>
-          <p:cNvPr id="46" name="Rectangle 45"/>
-          <p:cNvSpPr/>
-          <p:nvPr/>
-        </p:nvSpPr>
-        <p:spPr>
-          <a:xfrm>
-            <a:off x="2678430" y="5298902"/>
-            <a:ext cx="233680" cy="461818"/>
+          <p:cNvPr id="48" name="Rectangle 47"/>
+          <p:cNvSpPr/>
+          <p:nvPr/>
+        </p:nvSpPr>
+        <p:spPr>
+          <a:xfrm>
+            <a:off x="2678430" y="5354320"/>
+            <a:ext cx="233680" cy="406400"/>
           </a:xfrm>
           <a:prstGeom prst="rect">
             <a:avLst/>
@@ -4912,14 +4985,14 @@
       </p:sp>
       <p:sp>
         <p:nvSpPr>
-          <p:cNvPr id="47" name="Rectangle 46"/>
-          <p:cNvSpPr/>
-          <p:nvPr/>
-        </p:nvSpPr>
-        <p:spPr>
-          <a:xfrm>
-            <a:off x="2678430" y="4721629"/>
-            <a:ext cx="233680" cy="577273"/>
+          <p:cNvPr id="49" name="Rectangle 48"/>
+          <p:cNvSpPr/>
+          <p:nvPr/>
+        </p:nvSpPr>
+        <p:spPr>
+          <a:xfrm>
+            <a:off x="2678430" y="4846320"/>
+            <a:ext cx="233680" cy="508000"/>
           </a:xfrm>
           <a:prstGeom prst="rect">
             <a:avLst/>
@@ -4958,14 +5031,14 @@
       </p:sp>
       <p:sp>
         <p:nvSpPr>
-          <p:cNvPr id="48" name="Rectangle 47"/>
-          <p:cNvSpPr/>
-          <p:nvPr/>
-        </p:nvSpPr>
-        <p:spPr>
-          <a:xfrm>
-            <a:off x="2678430" y="3913447"/>
-            <a:ext cx="233680" cy="808182"/>
+          <p:cNvPr id="50" name="Rectangle 49"/>
+          <p:cNvSpPr/>
+          <p:nvPr/>
+        </p:nvSpPr>
+        <p:spPr>
+          <a:xfrm>
+            <a:off x="2678430" y="4135120"/>
+            <a:ext cx="233680" cy="711200"/>
           </a:xfrm>
           <a:prstGeom prst="rect">
             <a:avLst/>
@@ -5004,7 +5077,7 @@
       </p:sp>
       <p:sp>
         <p:nvSpPr>
-          <p:cNvPr id="49" name="Rectangle 48"/>
+          <p:cNvPr id="51" name="Rectangle 50"/>
           <p:cNvSpPr/>
           <p:nvPr/>
         </p:nvSpPr>
@@ -5048,7 +5121,7 @@
       </p:sp>
       <p:sp>
         <p:nvSpPr>
-          <p:cNvPr id="50" name="TextBox 49"/>
+          <p:cNvPr id="52" name="TextBox 51"/>
           <p:cNvSpPr txBox="1"/>
           <p:nvPr/>
         </p:nvSpPr>
@@ -5084,14 +5157,14 @@
       </p:sp>
       <p:sp>
         <p:nvSpPr>
-          <p:cNvPr id="51" name="Rectangle 50"/>
-          <p:cNvSpPr/>
-          <p:nvPr/>
-        </p:nvSpPr>
-        <p:spPr>
-          <a:xfrm>
-            <a:off x="2970530" y="5183447"/>
-            <a:ext cx="233680" cy="577273"/>
+          <p:cNvPr id="53" name="Rectangle 52"/>
+          <p:cNvSpPr/>
+          <p:nvPr/>
+        </p:nvSpPr>
+        <p:spPr>
+          <a:xfrm>
+            <a:off x="2970530" y="5252720"/>
+            <a:ext cx="233680" cy="508000"/>
           </a:xfrm>
           <a:prstGeom prst="rect">
             <a:avLst/>
@@ -5130,14 +5203,14 @@
       </p:sp>
       <p:sp>
         <p:nvSpPr>
-          <p:cNvPr id="52" name="Rectangle 51"/>
-          <p:cNvSpPr/>
-          <p:nvPr/>
-        </p:nvSpPr>
-        <p:spPr>
-          <a:xfrm>
-            <a:off x="2970530" y="4721629"/>
-            <a:ext cx="233680" cy="461818"/>
+          <p:cNvPr id="54" name="Rectangle 53"/>
+          <p:cNvSpPr/>
+          <p:nvPr/>
+        </p:nvSpPr>
+        <p:spPr>
+          <a:xfrm>
+            <a:off x="2970530" y="4846320"/>
+            <a:ext cx="233680" cy="406400"/>
           </a:xfrm>
           <a:prstGeom prst="rect">
             <a:avLst/>
@@ -5176,14 +5249,14 @@
       </p:sp>
       <p:sp>
         <p:nvSpPr>
-          <p:cNvPr id="53" name="Rectangle 52"/>
-          <p:cNvSpPr/>
-          <p:nvPr/>
-        </p:nvSpPr>
-        <p:spPr>
-          <a:xfrm>
-            <a:off x="2970530" y="3913447"/>
-            <a:ext cx="233680" cy="808182"/>
+          <p:cNvPr id="55" name="Rectangle 54"/>
+          <p:cNvSpPr/>
+          <p:nvPr/>
+        </p:nvSpPr>
+        <p:spPr>
+          <a:xfrm>
+            <a:off x="2970530" y="4135120"/>
+            <a:ext cx="233680" cy="711200"/>
           </a:xfrm>
           <a:prstGeom prst="rect">
             <a:avLst/>
@@ -5222,7 +5295,7 @@
       </p:sp>
       <p:sp>
         <p:nvSpPr>
-          <p:cNvPr id="54" name="Rectangle 53"/>
+          <p:cNvPr id="56" name="Rectangle 55"/>
           <p:cNvSpPr/>
           <p:nvPr/>
         </p:nvSpPr>
@@ -5266,7 +5339,7 @@
       </p:sp>
       <p:sp>
         <p:nvSpPr>
-          <p:cNvPr id="55" name="TextBox 54"/>
+          <p:cNvPr id="57" name="TextBox 56"/>
           <p:cNvSpPr txBox="1"/>
           <p:nvPr/>
         </p:nvSpPr>
@@ -5302,14 +5375,14 @@
       </p:sp>
       <p:sp>
         <p:nvSpPr>
-          <p:cNvPr id="56" name="Rectangle 55"/>
-          <p:cNvSpPr/>
-          <p:nvPr/>
-        </p:nvSpPr>
-        <p:spPr>
-          <a:xfrm>
-            <a:off x="3262630" y="5183447"/>
-            <a:ext cx="233680" cy="577273"/>
+          <p:cNvPr id="58" name="Rectangle 57"/>
+          <p:cNvSpPr/>
+          <p:nvPr/>
+        </p:nvSpPr>
+        <p:spPr>
+          <a:xfrm>
+            <a:off x="3262630" y="5252720"/>
+            <a:ext cx="233680" cy="508000"/>
           </a:xfrm>
           <a:prstGeom prst="rect">
             <a:avLst/>
@@ -5348,14 +5421,14 @@
       </p:sp>
       <p:sp>
         <p:nvSpPr>
-          <p:cNvPr id="57" name="Rectangle 56"/>
-          <p:cNvSpPr/>
-          <p:nvPr/>
-        </p:nvSpPr>
-        <p:spPr>
-          <a:xfrm>
-            <a:off x="3262630" y="4721629"/>
-            <a:ext cx="233680" cy="461818"/>
+          <p:cNvPr id="59" name="Rectangle 58"/>
+          <p:cNvSpPr/>
+          <p:nvPr/>
+        </p:nvSpPr>
+        <p:spPr>
+          <a:xfrm>
+            <a:off x="3262630" y="4846320"/>
+            <a:ext cx="233680" cy="406400"/>
           </a:xfrm>
           <a:prstGeom prst="rect">
             <a:avLst/>
@@ -5394,14 +5467,14 @@
       </p:sp>
       <p:sp>
         <p:nvSpPr>
-          <p:cNvPr id="58" name="Rectangle 57"/>
-          <p:cNvSpPr/>
-          <p:nvPr/>
-        </p:nvSpPr>
-        <p:spPr>
-          <a:xfrm>
-            <a:off x="3262630" y="3913447"/>
-            <a:ext cx="233680" cy="808182"/>
+          <p:cNvPr id="60" name="Rectangle 59"/>
+          <p:cNvSpPr/>
+          <p:nvPr/>
+        </p:nvSpPr>
+        <p:spPr>
+          <a:xfrm>
+            <a:off x="3262630" y="4135120"/>
+            <a:ext cx="233680" cy="711200"/>
           </a:xfrm>
           <a:prstGeom prst="rect">
             <a:avLst/>
@@ -5440,7 +5513,7 @@
       </p:sp>
       <p:sp>
         <p:nvSpPr>
-          <p:cNvPr id="59" name="Rectangle 58"/>
+          <p:cNvPr id="61" name="Rectangle 60"/>
           <p:cNvSpPr/>
           <p:nvPr/>
         </p:nvSpPr>
@@ -5484,7 +5557,7 @@
       </p:sp>
       <p:sp>
         <p:nvSpPr>
-          <p:cNvPr id="60" name="TextBox 59"/>
+          <p:cNvPr id="62" name="TextBox 61"/>
           <p:cNvSpPr txBox="1"/>
           <p:nvPr/>
         </p:nvSpPr>
@@ -5520,14 +5593,14 @@
       </p:sp>
       <p:sp>
         <p:nvSpPr>
-          <p:cNvPr id="61" name="Rectangle 60"/>
-          <p:cNvSpPr/>
-          <p:nvPr/>
-        </p:nvSpPr>
-        <p:spPr>
-          <a:xfrm>
-            <a:off x="3554730" y="5067993"/>
-            <a:ext cx="233680" cy="692727"/>
+          <p:cNvPr id="63" name="Rectangle 62"/>
+          <p:cNvSpPr/>
+          <p:nvPr/>
+        </p:nvSpPr>
+        <p:spPr>
+          <a:xfrm>
+            <a:off x="3554730" y="5151120"/>
+            <a:ext cx="233680" cy="609600"/>
           </a:xfrm>
           <a:prstGeom prst="rect">
             <a:avLst/>
@@ -5566,14 +5639,14 @@
       </p:sp>
       <p:sp>
         <p:nvSpPr>
-          <p:cNvPr id="62" name="Rectangle 61"/>
-          <p:cNvSpPr/>
-          <p:nvPr/>
-        </p:nvSpPr>
-        <p:spPr>
-          <a:xfrm>
-            <a:off x="3554730" y="4606175"/>
-            <a:ext cx="233680" cy="461818"/>
+          <p:cNvPr id="64" name="Rectangle 63"/>
+          <p:cNvSpPr/>
+          <p:nvPr/>
+        </p:nvSpPr>
+        <p:spPr>
+          <a:xfrm>
+            <a:off x="3554730" y="4744720"/>
+            <a:ext cx="233680" cy="406400"/>
           </a:xfrm>
           <a:prstGeom prst="rect">
             <a:avLst/>
@@ -5612,14 +5685,14 @@
       </p:sp>
       <p:sp>
         <p:nvSpPr>
-          <p:cNvPr id="63" name="Rectangle 62"/>
-          <p:cNvSpPr/>
-          <p:nvPr/>
-        </p:nvSpPr>
-        <p:spPr>
-          <a:xfrm>
-            <a:off x="3554730" y="3913447"/>
-            <a:ext cx="233680" cy="692727"/>
+          <p:cNvPr id="65" name="Rectangle 64"/>
+          <p:cNvSpPr/>
+          <p:nvPr/>
+        </p:nvSpPr>
+        <p:spPr>
+          <a:xfrm>
+            <a:off x="3554730" y="4135120"/>
+            <a:ext cx="233680" cy="609600"/>
           </a:xfrm>
           <a:prstGeom prst="rect">
             <a:avLst/>
@@ -5658,7 +5731,7 @@
       </p:sp>
       <p:sp>
         <p:nvSpPr>
-          <p:cNvPr id="64" name="Rectangle 63"/>
+          <p:cNvPr id="66" name="Rectangle 65"/>
           <p:cNvSpPr/>
           <p:nvPr/>
         </p:nvSpPr>
@@ -5702,7 +5775,7 @@
       </p:sp>
       <p:sp>
         <p:nvSpPr>
-          <p:cNvPr id="65" name="TextBox 64"/>
+          <p:cNvPr id="67" name="TextBox 66"/>
           <p:cNvSpPr txBox="1"/>
           <p:nvPr/>
         </p:nvSpPr>
@@ -5738,14 +5811,14 @@
       </p:sp>
       <p:sp>
         <p:nvSpPr>
-          <p:cNvPr id="66" name="Rectangle 65"/>
-          <p:cNvSpPr/>
-          <p:nvPr/>
-        </p:nvSpPr>
-        <p:spPr>
-          <a:xfrm>
-            <a:off x="3846830" y="5298902"/>
-            <a:ext cx="233680" cy="461818"/>
+          <p:cNvPr id="68" name="Rectangle 67"/>
+          <p:cNvSpPr/>
+          <p:nvPr/>
+        </p:nvSpPr>
+        <p:spPr>
+          <a:xfrm>
+            <a:off x="3846830" y="5354320"/>
+            <a:ext cx="233680" cy="406400"/>
           </a:xfrm>
           <a:prstGeom prst="rect">
             <a:avLst/>
@@ -5784,14 +5857,14 @@
       </p:sp>
       <p:sp>
         <p:nvSpPr>
-          <p:cNvPr id="67" name="Rectangle 66"/>
-          <p:cNvSpPr/>
-          <p:nvPr/>
-        </p:nvSpPr>
-        <p:spPr>
-          <a:xfrm>
-            <a:off x="3846830" y="4721629"/>
-            <a:ext cx="233680" cy="577273"/>
+          <p:cNvPr id="69" name="Rectangle 68"/>
+          <p:cNvSpPr/>
+          <p:nvPr/>
+        </p:nvSpPr>
+        <p:spPr>
+          <a:xfrm>
+            <a:off x="3846830" y="4846320"/>
+            <a:ext cx="233680" cy="508000"/>
           </a:xfrm>
           <a:prstGeom prst="rect">
             <a:avLst/>
@@ -5830,14 +5903,14 @@
       </p:sp>
       <p:sp>
         <p:nvSpPr>
-          <p:cNvPr id="68" name="Rectangle 67"/>
-          <p:cNvSpPr/>
-          <p:nvPr/>
-        </p:nvSpPr>
-        <p:spPr>
-          <a:xfrm>
-            <a:off x="3846830" y="3682538"/>
-            <a:ext cx="233680" cy="1039091"/>
+          <p:cNvPr id="70" name="Rectangle 69"/>
+          <p:cNvSpPr/>
+          <p:nvPr/>
+        </p:nvSpPr>
+        <p:spPr>
+          <a:xfrm>
+            <a:off x="3846830" y="3931920"/>
+            <a:ext cx="233680" cy="914400"/>
           </a:xfrm>
           <a:prstGeom prst="rect">
             <a:avLst/>
@@ -5876,7 +5949,7 @@
       </p:sp>
       <p:sp>
         <p:nvSpPr>
-          <p:cNvPr id="69" name="Rectangle 68"/>
+          <p:cNvPr id="71" name="Rectangle 70"/>
           <p:cNvSpPr/>
           <p:nvPr/>
         </p:nvSpPr>
@@ -5920,7 +5993,7 @@
       </p:sp>
       <p:sp>
         <p:nvSpPr>
-          <p:cNvPr id="70" name="TextBox 69"/>
+          <p:cNvPr id="72" name="TextBox 71"/>
           <p:cNvSpPr txBox="1"/>
           <p:nvPr/>
         </p:nvSpPr>
@@ -5956,14 +6029,14 @@
       </p:sp>
       <p:sp>
         <p:nvSpPr>
-          <p:cNvPr id="71" name="Rectangle 70"/>
-          <p:cNvSpPr/>
-          <p:nvPr/>
-        </p:nvSpPr>
-        <p:spPr>
-          <a:xfrm>
-            <a:off x="4138930" y="5067993"/>
-            <a:ext cx="233680" cy="692727"/>
+          <p:cNvPr id="73" name="Rectangle 72"/>
+          <p:cNvSpPr/>
+          <p:nvPr/>
+        </p:nvSpPr>
+        <p:spPr>
+          <a:xfrm>
+            <a:off x="4138930" y="5151120"/>
+            <a:ext cx="233680" cy="609600"/>
           </a:xfrm>
           <a:prstGeom prst="rect">
             <a:avLst/>
@@ -6002,14 +6075,14 @@
       </p:sp>
       <p:sp>
         <p:nvSpPr>
-          <p:cNvPr id="72" name="Rectangle 71"/>
-          <p:cNvSpPr/>
-          <p:nvPr/>
-        </p:nvSpPr>
-        <p:spPr>
-          <a:xfrm>
-            <a:off x="4138930" y="4490720"/>
-            <a:ext cx="233680" cy="577273"/>
+          <p:cNvPr id="74" name="Rectangle 73"/>
+          <p:cNvSpPr/>
+          <p:nvPr/>
+        </p:nvSpPr>
+        <p:spPr>
+          <a:xfrm>
+            <a:off x="4138930" y="4643120"/>
+            <a:ext cx="233680" cy="508000"/>
           </a:xfrm>
           <a:prstGeom prst="rect">
             <a:avLst/>
@@ -6048,14 +6121,14 @@
       </p:sp>
       <p:sp>
         <p:nvSpPr>
-          <p:cNvPr id="73" name="Rectangle 72"/>
-          <p:cNvSpPr/>
-          <p:nvPr/>
-        </p:nvSpPr>
-        <p:spPr>
-          <a:xfrm>
-            <a:off x="4138930" y="3451629"/>
-            <a:ext cx="233680" cy="1039091"/>
+          <p:cNvPr id="75" name="Rectangle 74"/>
+          <p:cNvSpPr/>
+          <p:nvPr/>
+        </p:nvSpPr>
+        <p:spPr>
+          <a:xfrm>
+            <a:off x="4138930" y="3728720"/>
+            <a:ext cx="233680" cy="914400"/>
           </a:xfrm>
           <a:prstGeom prst="rect">
             <a:avLst/>
@@ -6094,7 +6167,7 @@
       </p:sp>
       <p:sp>
         <p:nvSpPr>
-          <p:cNvPr id="74" name="Rectangle 73"/>
+          <p:cNvPr id="76" name="Rectangle 75"/>
           <p:cNvSpPr/>
           <p:nvPr/>
         </p:nvSpPr>
@@ -6138,7 +6211,7 @@
       </p:sp>
       <p:sp>
         <p:nvSpPr>
-          <p:cNvPr id="75" name="TextBox 74"/>
+          <p:cNvPr id="77" name="TextBox 76"/>
           <p:cNvSpPr txBox="1"/>
           <p:nvPr/>
         </p:nvSpPr>
@@ -6174,14 +6247,14 @@
       </p:sp>
       <p:sp>
         <p:nvSpPr>
-          <p:cNvPr id="76" name="Rectangle 75"/>
-          <p:cNvSpPr/>
-          <p:nvPr/>
-        </p:nvSpPr>
-        <p:spPr>
-          <a:xfrm>
-            <a:off x="4431030" y="4952538"/>
-            <a:ext cx="233680" cy="808182"/>
+          <p:cNvPr id="78" name="Rectangle 77"/>
+          <p:cNvSpPr/>
+          <p:nvPr/>
+        </p:nvSpPr>
+        <p:spPr>
+          <a:xfrm>
+            <a:off x="4431030" y="5049520"/>
+            <a:ext cx="233680" cy="711200"/>
           </a:xfrm>
           <a:prstGeom prst="rect">
             <a:avLst/>
@@ -6220,14 +6293,14 @@
       </p:sp>
       <p:sp>
         <p:nvSpPr>
-          <p:cNvPr id="77" name="Rectangle 76"/>
-          <p:cNvSpPr/>
-          <p:nvPr/>
-        </p:nvSpPr>
-        <p:spPr>
-          <a:xfrm>
-            <a:off x="4431030" y="4375265"/>
-            <a:ext cx="233680" cy="577273"/>
+          <p:cNvPr id="79" name="Rectangle 78"/>
+          <p:cNvSpPr/>
+          <p:nvPr/>
+        </p:nvSpPr>
+        <p:spPr>
+          <a:xfrm>
+            <a:off x="4431030" y="4541520"/>
+            <a:ext cx="233680" cy="508000"/>
           </a:xfrm>
           <a:prstGeom prst="rect">
             <a:avLst/>
@@ -6266,14 +6339,14 @@
       </p:sp>
       <p:sp>
         <p:nvSpPr>
-          <p:cNvPr id="78" name="Rectangle 77"/>
-          <p:cNvSpPr/>
-          <p:nvPr/>
-        </p:nvSpPr>
-        <p:spPr>
-          <a:xfrm>
-            <a:off x="4431030" y="3220720"/>
-            <a:ext cx="233680" cy="1154545"/>
+          <p:cNvPr id="80" name="Rectangle 79"/>
+          <p:cNvSpPr/>
+          <p:nvPr/>
+        </p:nvSpPr>
+        <p:spPr>
+          <a:xfrm>
+            <a:off x="4431030" y="3525520"/>
+            <a:ext cx="233680" cy="1016000"/>
           </a:xfrm>
           <a:prstGeom prst="rect">
             <a:avLst/>
@@ -6312,7 +6385,7 @@
       </p:sp>
       <p:sp>
         <p:nvSpPr>
-          <p:cNvPr id="79" name="Rectangle 78"/>
+          <p:cNvPr id="81" name="Rectangle 80"/>
           <p:cNvSpPr/>
           <p:nvPr/>
         </p:nvSpPr>
@@ -6356,7 +6429,7 @@
       </p:sp>
       <p:sp>
         <p:nvSpPr>
-          <p:cNvPr id="80" name="TextBox 79"/>
+          <p:cNvPr id="82" name="TextBox 81"/>
           <p:cNvSpPr txBox="1"/>
           <p:nvPr/>
         </p:nvSpPr>
@@ -6392,14 +6465,14 @@
       </p:sp>
       <p:sp>
         <p:nvSpPr>
-          <p:cNvPr id="81" name="Rectangle 80"/>
-          <p:cNvSpPr/>
-          <p:nvPr/>
-        </p:nvSpPr>
-        <p:spPr>
-          <a:xfrm>
-            <a:off x="4723130" y="5067993"/>
-            <a:ext cx="233680" cy="692727"/>
+          <p:cNvPr id="83" name="Rectangle 82"/>
+          <p:cNvSpPr/>
+          <p:nvPr/>
+        </p:nvSpPr>
+        <p:spPr>
+          <a:xfrm>
+            <a:off x="4723130" y="5151120"/>
+            <a:ext cx="233680" cy="609600"/>
           </a:xfrm>
           <a:prstGeom prst="rect">
             <a:avLst/>
@@ -6438,14 +6511,14 @@
       </p:sp>
       <p:sp>
         <p:nvSpPr>
-          <p:cNvPr id="82" name="Rectangle 81"/>
-          <p:cNvSpPr/>
-          <p:nvPr/>
-        </p:nvSpPr>
-        <p:spPr>
-          <a:xfrm>
-            <a:off x="4723130" y="4375265"/>
-            <a:ext cx="233680" cy="692727"/>
+          <p:cNvPr id="84" name="Rectangle 83"/>
+          <p:cNvSpPr/>
+          <p:nvPr/>
+        </p:nvSpPr>
+        <p:spPr>
+          <a:xfrm>
+            <a:off x="4723130" y="4541520"/>
+            <a:ext cx="233680" cy="609600"/>
           </a:xfrm>
           <a:prstGeom prst="rect">
             <a:avLst/>
@@ -6484,14 +6557,14 @@
       </p:sp>
       <p:sp>
         <p:nvSpPr>
-          <p:cNvPr id="83" name="Rectangle 82"/>
-          <p:cNvSpPr/>
-          <p:nvPr/>
-        </p:nvSpPr>
-        <p:spPr>
-          <a:xfrm>
-            <a:off x="4723130" y="2989811"/>
-            <a:ext cx="233680" cy="1385455"/>
+          <p:cNvPr id="85" name="Rectangle 84"/>
+          <p:cNvSpPr/>
+          <p:nvPr/>
+        </p:nvSpPr>
+        <p:spPr>
+          <a:xfrm>
+            <a:off x="4723130" y="3322320"/>
+            <a:ext cx="233680" cy="1219200"/>
           </a:xfrm>
           <a:prstGeom prst="rect">
             <a:avLst/>
@@ -6530,7 +6603,7 @@
       </p:sp>
       <p:sp>
         <p:nvSpPr>
-          <p:cNvPr id="84" name="Rectangle 83"/>
+          <p:cNvPr id="86" name="Rectangle 85"/>
           <p:cNvSpPr/>
           <p:nvPr/>
         </p:nvSpPr>
@@ -6574,7 +6647,7 @@
       </p:sp>
       <p:sp>
         <p:nvSpPr>
-          <p:cNvPr id="85" name="TextBox 84"/>
+          <p:cNvPr id="87" name="TextBox 86"/>
           <p:cNvSpPr txBox="1"/>
           <p:nvPr/>
         </p:nvSpPr>
@@ -6610,14 +6683,14 @@
       </p:sp>
       <p:sp>
         <p:nvSpPr>
-          <p:cNvPr id="86" name="Rectangle 85"/>
-          <p:cNvSpPr/>
-          <p:nvPr/>
-        </p:nvSpPr>
-        <p:spPr>
-          <a:xfrm>
-            <a:off x="5015230" y="5183447"/>
-            <a:ext cx="233680" cy="577273"/>
+          <p:cNvPr id="88" name="Rectangle 87"/>
+          <p:cNvSpPr/>
+          <p:nvPr/>
+        </p:nvSpPr>
+        <p:spPr>
+          <a:xfrm>
+            <a:off x="5015230" y="5252720"/>
+            <a:ext cx="233680" cy="508000"/>
           </a:xfrm>
           <a:prstGeom prst="rect">
             <a:avLst/>
@@ -6656,14 +6729,14 @@
       </p:sp>
       <p:sp>
         <p:nvSpPr>
-          <p:cNvPr id="87" name="Rectangle 86"/>
-          <p:cNvSpPr/>
-          <p:nvPr/>
-        </p:nvSpPr>
-        <p:spPr>
-          <a:xfrm>
-            <a:off x="5015230" y="4375265"/>
-            <a:ext cx="233680" cy="808182"/>
+          <p:cNvPr id="89" name="Rectangle 88"/>
+          <p:cNvSpPr/>
+          <p:nvPr/>
+        </p:nvSpPr>
+        <p:spPr>
+          <a:xfrm>
+            <a:off x="5015230" y="4541520"/>
+            <a:ext cx="233680" cy="711200"/>
           </a:xfrm>
           <a:prstGeom prst="rect">
             <a:avLst/>
@@ -6702,14 +6775,14 @@
       </p:sp>
       <p:sp>
         <p:nvSpPr>
-          <p:cNvPr id="88" name="Rectangle 87"/>
-          <p:cNvSpPr/>
-          <p:nvPr/>
-        </p:nvSpPr>
-        <p:spPr>
-          <a:xfrm>
-            <a:off x="5015230" y="2989811"/>
-            <a:ext cx="233680" cy="1385455"/>
+          <p:cNvPr id="90" name="Rectangle 89"/>
+          <p:cNvSpPr/>
+          <p:nvPr/>
+        </p:nvSpPr>
+        <p:spPr>
+          <a:xfrm>
+            <a:off x="5015230" y="3322320"/>
+            <a:ext cx="233680" cy="1219200"/>
           </a:xfrm>
           <a:prstGeom prst="rect">
             <a:avLst/>
@@ -6748,7 +6821,7 @@
       </p:sp>
       <p:sp>
         <p:nvSpPr>
-          <p:cNvPr id="89" name="Rectangle 88"/>
+          <p:cNvPr id="91" name="Rectangle 90"/>
           <p:cNvSpPr/>
           <p:nvPr/>
         </p:nvSpPr>
@@ -6792,7 +6865,7 @@
       </p:sp>
       <p:sp>
         <p:nvSpPr>
-          <p:cNvPr id="90" name="TextBox 89"/>
+          <p:cNvPr id="92" name="TextBox 91"/>
           <p:cNvSpPr txBox="1"/>
           <p:nvPr/>
         </p:nvSpPr>
@@ -6828,14 +6901,14 @@
       </p:sp>
       <p:sp>
         <p:nvSpPr>
-          <p:cNvPr id="91" name="Rectangle 90"/>
-          <p:cNvSpPr/>
-          <p:nvPr/>
-        </p:nvSpPr>
-        <p:spPr>
-          <a:xfrm>
-            <a:off x="5307330" y="5298902"/>
-            <a:ext cx="233680" cy="461818"/>
+          <p:cNvPr id="93" name="Rectangle 92"/>
+          <p:cNvSpPr/>
+          <p:nvPr/>
+        </p:nvSpPr>
+        <p:spPr>
+          <a:xfrm>
+            <a:off x="5307330" y="5354320"/>
+            <a:ext cx="233680" cy="406400"/>
           </a:xfrm>
           <a:prstGeom prst="rect">
             <a:avLst/>
@@ -6874,14 +6947,14 @@
       </p:sp>
       <p:sp>
         <p:nvSpPr>
-          <p:cNvPr id="92" name="Rectangle 91"/>
-          <p:cNvSpPr/>
-          <p:nvPr/>
-        </p:nvSpPr>
-        <p:spPr>
-          <a:xfrm>
-            <a:off x="5307330" y="4490720"/>
-            <a:ext cx="233680" cy="808182"/>
+          <p:cNvPr id="94" name="Rectangle 93"/>
+          <p:cNvSpPr/>
+          <p:nvPr/>
+        </p:nvSpPr>
+        <p:spPr>
+          <a:xfrm>
+            <a:off x="5307330" y="4643120"/>
+            <a:ext cx="233680" cy="711200"/>
           </a:xfrm>
           <a:prstGeom prst="rect">
             <a:avLst/>
@@ -6920,14 +6993,14 @@
       </p:sp>
       <p:sp>
         <p:nvSpPr>
-          <p:cNvPr id="93" name="Rectangle 92"/>
-          <p:cNvSpPr/>
-          <p:nvPr/>
-        </p:nvSpPr>
-        <p:spPr>
-          <a:xfrm>
-            <a:off x="5307330" y="2989811"/>
-            <a:ext cx="233680" cy="1500909"/>
+          <p:cNvPr id="95" name="Rectangle 94"/>
+          <p:cNvSpPr/>
+          <p:nvPr/>
+        </p:nvSpPr>
+        <p:spPr>
+          <a:xfrm>
+            <a:off x="5307330" y="3322320"/>
+            <a:ext cx="233680" cy="1320800"/>
           </a:xfrm>
           <a:prstGeom prst="rect">
             <a:avLst/>
@@ -6966,7 +7039,7 @@
       </p:sp>
       <p:sp>
         <p:nvSpPr>
-          <p:cNvPr id="94" name="Rectangle 93"/>
+          <p:cNvPr id="96" name="Rectangle 95"/>
           <p:cNvSpPr/>
           <p:nvPr/>
         </p:nvSpPr>
@@ -7010,7 +7083,7 @@
       </p:sp>
       <p:sp>
         <p:nvSpPr>
-          <p:cNvPr id="95" name="TextBox 94"/>
+          <p:cNvPr id="97" name="TextBox 96"/>
           <p:cNvSpPr txBox="1"/>
           <p:nvPr/>
         </p:nvSpPr>
@@ -7046,14 +7119,14 @@
       </p:sp>
       <p:sp>
         <p:nvSpPr>
-          <p:cNvPr id="96" name="Rectangle 95"/>
-          <p:cNvSpPr/>
-          <p:nvPr/>
-        </p:nvSpPr>
-        <p:spPr>
-          <a:xfrm>
-            <a:off x="5599430" y="5067993"/>
-            <a:ext cx="233680" cy="692727"/>
+          <p:cNvPr id="98" name="Rectangle 97"/>
+          <p:cNvSpPr/>
+          <p:nvPr/>
+        </p:nvSpPr>
+        <p:spPr>
+          <a:xfrm>
+            <a:off x="5599430" y="5151120"/>
+            <a:ext cx="233680" cy="609600"/>
           </a:xfrm>
           <a:prstGeom prst="rect">
             <a:avLst/>
@@ -7092,14 +7165,14 @@
       </p:sp>
       <p:sp>
         <p:nvSpPr>
-          <p:cNvPr id="97" name="Rectangle 96"/>
-          <p:cNvSpPr/>
-          <p:nvPr/>
-        </p:nvSpPr>
-        <p:spPr>
-          <a:xfrm>
-            <a:off x="5599430" y="4259811"/>
-            <a:ext cx="233680" cy="808182"/>
+          <p:cNvPr id="99" name="Rectangle 98"/>
+          <p:cNvSpPr/>
+          <p:nvPr/>
+        </p:nvSpPr>
+        <p:spPr>
+          <a:xfrm>
+            <a:off x="5599430" y="4439920"/>
+            <a:ext cx="233680" cy="711200"/>
           </a:xfrm>
           <a:prstGeom prst="rect">
             <a:avLst/>
@@ -7138,14 +7211,14 @@
       </p:sp>
       <p:sp>
         <p:nvSpPr>
-          <p:cNvPr id="98" name="Rectangle 97"/>
-          <p:cNvSpPr/>
-          <p:nvPr/>
-        </p:nvSpPr>
-        <p:spPr>
-          <a:xfrm>
-            <a:off x="5599430" y="2527993"/>
-            <a:ext cx="233680" cy="1731818"/>
+          <p:cNvPr id="100" name="Rectangle 99"/>
+          <p:cNvSpPr/>
+          <p:nvPr/>
+        </p:nvSpPr>
+        <p:spPr>
+          <a:xfrm>
+            <a:off x="5599430" y="2915920"/>
+            <a:ext cx="233680" cy="1524000"/>
           </a:xfrm>
           <a:prstGeom prst="rect">
             <a:avLst/>
@@ -7184,7 +7257,7 @@
       </p:sp>
       <p:sp>
         <p:nvSpPr>
-          <p:cNvPr id="99" name="Rectangle 98"/>
+          <p:cNvPr id="101" name="Rectangle 100"/>
           <p:cNvSpPr/>
           <p:nvPr/>
         </p:nvSpPr>
@@ -7228,7 +7301,7 @@
       </p:sp>
       <p:sp>
         <p:nvSpPr>
-          <p:cNvPr id="100" name="TextBox 99"/>
+          <p:cNvPr id="102" name="TextBox 101"/>
           <p:cNvSpPr txBox="1"/>
           <p:nvPr/>
         </p:nvSpPr>
@@ -7264,14 +7337,14 @@
       </p:sp>
       <p:sp>
         <p:nvSpPr>
-          <p:cNvPr id="101" name="Rectangle 100"/>
-          <p:cNvSpPr/>
-          <p:nvPr/>
-        </p:nvSpPr>
-        <p:spPr>
-          <a:xfrm>
-            <a:off x="5891530" y="5183447"/>
-            <a:ext cx="233680" cy="577273"/>
+          <p:cNvPr id="103" name="Rectangle 102"/>
+          <p:cNvSpPr/>
+          <p:nvPr/>
+        </p:nvSpPr>
+        <p:spPr>
+          <a:xfrm>
+            <a:off x="5891530" y="5252720"/>
+            <a:ext cx="233680" cy="508000"/>
           </a:xfrm>
           <a:prstGeom prst="rect">
             <a:avLst/>
@@ -7310,14 +7383,14 @@
       </p:sp>
       <p:sp>
         <p:nvSpPr>
-          <p:cNvPr id="102" name="Rectangle 101"/>
-          <p:cNvSpPr/>
-          <p:nvPr/>
-        </p:nvSpPr>
-        <p:spPr>
-          <a:xfrm>
-            <a:off x="5891530" y="4144356"/>
-            <a:ext cx="233680" cy="1039091"/>
+          <p:cNvPr id="104" name="Rectangle 103"/>
+          <p:cNvSpPr/>
+          <p:nvPr/>
+        </p:nvSpPr>
+        <p:spPr>
+          <a:xfrm>
+            <a:off x="5891530" y="4338320"/>
+            <a:ext cx="233680" cy="914400"/>
           </a:xfrm>
           <a:prstGeom prst="rect">
             <a:avLst/>
@@ -7356,14 +7429,14 @@
       </p:sp>
       <p:sp>
         <p:nvSpPr>
-          <p:cNvPr id="103" name="Rectangle 102"/>
-          <p:cNvSpPr/>
-          <p:nvPr/>
-        </p:nvSpPr>
-        <p:spPr>
-          <a:xfrm>
-            <a:off x="5891530" y="2297084"/>
-            <a:ext cx="233680" cy="1847273"/>
+          <p:cNvPr id="105" name="Rectangle 104"/>
+          <p:cNvSpPr/>
+          <p:nvPr/>
+        </p:nvSpPr>
+        <p:spPr>
+          <a:xfrm>
+            <a:off x="5891530" y="2712720"/>
+            <a:ext cx="233680" cy="1625600"/>
           </a:xfrm>
           <a:prstGeom prst="rect">
             <a:avLst/>
@@ -7402,7 +7475,7 @@
       </p:sp>
       <p:sp>
         <p:nvSpPr>
-          <p:cNvPr id="104" name="Rectangle 103"/>
+          <p:cNvPr id="106" name="Rectangle 105"/>
           <p:cNvSpPr/>
           <p:nvPr/>
         </p:nvSpPr>
@@ -7446,7 +7519,7 @@
       </p:sp>
       <p:sp>
         <p:nvSpPr>
-          <p:cNvPr id="105" name="TextBox 104"/>
+          <p:cNvPr id="107" name="TextBox 106"/>
           <p:cNvSpPr txBox="1"/>
           <p:nvPr/>
         </p:nvSpPr>
@@ -7482,14 +7555,14 @@
       </p:sp>
       <p:sp>
         <p:nvSpPr>
-          <p:cNvPr id="106" name="Rectangle 105"/>
-          <p:cNvSpPr/>
-          <p:nvPr/>
-        </p:nvSpPr>
-        <p:spPr>
-          <a:xfrm>
-            <a:off x="6183630" y="5414356"/>
-            <a:ext cx="233680" cy="346364"/>
+          <p:cNvPr id="108" name="Rectangle 107"/>
+          <p:cNvSpPr/>
+          <p:nvPr/>
+        </p:nvSpPr>
+        <p:spPr>
+          <a:xfrm>
+            <a:off x="6183630" y="5455920"/>
+            <a:ext cx="233680" cy="304800"/>
           </a:xfrm>
           <a:prstGeom prst="rect">
             <a:avLst/>
@@ -7528,14 +7601,14 @@
       </p:sp>
       <p:sp>
         <p:nvSpPr>
-          <p:cNvPr id="107" name="Rectangle 106"/>
-          <p:cNvSpPr/>
-          <p:nvPr/>
-        </p:nvSpPr>
-        <p:spPr>
-          <a:xfrm>
-            <a:off x="6183630" y="5067993"/>
-            <a:ext cx="233680" cy="346364"/>
+          <p:cNvPr id="109" name="Rectangle 108"/>
+          <p:cNvSpPr/>
+          <p:nvPr/>
+        </p:nvSpPr>
+        <p:spPr>
+          <a:xfrm>
+            <a:off x="6183630" y="5151120"/>
+            <a:ext cx="233680" cy="304800"/>
           </a:xfrm>
           <a:prstGeom prst="rect">
             <a:avLst/>
@@ -7574,14 +7647,14 @@
       </p:sp>
       <p:sp>
         <p:nvSpPr>
-          <p:cNvPr id="108" name="Rectangle 107"/>
-          <p:cNvSpPr/>
-          <p:nvPr/>
-        </p:nvSpPr>
-        <p:spPr>
-          <a:xfrm>
-            <a:off x="6183630" y="4606175"/>
-            <a:ext cx="233680" cy="461818"/>
+          <p:cNvPr id="110" name="Rectangle 109"/>
+          <p:cNvSpPr/>
+          <p:nvPr/>
+        </p:nvSpPr>
+        <p:spPr>
+          <a:xfrm>
+            <a:off x="6183630" y="4744720"/>
+            <a:ext cx="233680" cy="406400"/>
           </a:xfrm>
           <a:prstGeom prst="rect">
             <a:avLst/>
@@ -7620,7 +7693,7 @@
       </p:sp>
       <p:sp>
         <p:nvSpPr>
-          <p:cNvPr id="109" name="Rectangle 108"/>
+          <p:cNvPr id="111" name="Rectangle 110"/>
           <p:cNvSpPr/>
           <p:nvPr/>
         </p:nvSpPr>
@@ -7664,7 +7737,7 @@
       </p:sp>
       <p:sp>
         <p:nvSpPr>
-          <p:cNvPr id="110" name="TextBox 109"/>
+          <p:cNvPr id="112" name="TextBox 111"/>
           <p:cNvSpPr txBox="1"/>
           <p:nvPr/>
         </p:nvSpPr>
@@ -7700,14 +7773,14 @@
       </p:sp>
       <p:sp>
         <p:nvSpPr>
-          <p:cNvPr id="111" name="Rectangle 110"/>
-          <p:cNvSpPr/>
-          <p:nvPr/>
-        </p:nvSpPr>
-        <p:spPr>
-          <a:xfrm>
-            <a:off x="6475730" y="5414356"/>
-            <a:ext cx="233680" cy="346364"/>
+          <p:cNvPr id="113" name="Rectangle 112"/>
+          <p:cNvSpPr/>
+          <p:nvPr/>
+        </p:nvSpPr>
+        <p:spPr>
+          <a:xfrm>
+            <a:off x="6475730" y="5455920"/>
+            <a:ext cx="233680" cy="304800"/>
           </a:xfrm>
           <a:prstGeom prst="rect">
             <a:avLst/>
@@ -7746,14 +7819,14 @@
       </p:sp>
       <p:sp>
         <p:nvSpPr>
-          <p:cNvPr id="112" name="Rectangle 111"/>
-          <p:cNvSpPr/>
-          <p:nvPr/>
-        </p:nvSpPr>
-        <p:spPr>
-          <a:xfrm>
-            <a:off x="6475730" y="5067993"/>
-            <a:ext cx="233680" cy="346364"/>
+          <p:cNvPr id="114" name="Rectangle 113"/>
+          <p:cNvSpPr/>
+          <p:nvPr/>
+        </p:nvSpPr>
+        <p:spPr>
+          <a:xfrm>
+            <a:off x="6475730" y="5151120"/>
+            <a:ext cx="233680" cy="304800"/>
           </a:xfrm>
           <a:prstGeom prst="rect">
             <a:avLst/>
@@ -7792,14 +7865,14 @@
       </p:sp>
       <p:sp>
         <p:nvSpPr>
-          <p:cNvPr id="113" name="Rectangle 112"/>
-          <p:cNvSpPr/>
-          <p:nvPr/>
-        </p:nvSpPr>
-        <p:spPr>
-          <a:xfrm>
-            <a:off x="6475730" y="4490720"/>
-            <a:ext cx="233680" cy="577273"/>
+          <p:cNvPr id="115" name="Rectangle 114"/>
+          <p:cNvSpPr/>
+          <p:nvPr/>
+        </p:nvSpPr>
+        <p:spPr>
+          <a:xfrm>
+            <a:off x="6475730" y="4643120"/>
+            <a:ext cx="233680" cy="508000"/>
           </a:xfrm>
           <a:prstGeom prst="rect">
             <a:avLst/>
@@ -7838,7 +7911,7 @@
       </p:sp>
       <p:sp>
         <p:nvSpPr>
-          <p:cNvPr id="114" name="Rectangle 113"/>
+          <p:cNvPr id="116" name="Rectangle 115"/>
           <p:cNvSpPr/>
           <p:nvPr/>
         </p:nvSpPr>
@@ -7882,7 +7955,7 @@
       </p:sp>
       <p:sp>
         <p:nvSpPr>
-          <p:cNvPr id="115" name="TextBox 114"/>
+          <p:cNvPr id="117" name="TextBox 116"/>
           <p:cNvSpPr txBox="1"/>
           <p:nvPr/>
         </p:nvSpPr>
@@ -7918,14 +7991,14 @@
       </p:sp>
       <p:sp>
         <p:nvSpPr>
-          <p:cNvPr id="116" name="Rectangle 115"/>
-          <p:cNvSpPr/>
-          <p:nvPr/>
-        </p:nvSpPr>
-        <p:spPr>
-          <a:xfrm>
-            <a:off x="6767830" y="5414356"/>
-            <a:ext cx="233680" cy="346364"/>
+          <p:cNvPr id="118" name="Rectangle 117"/>
+          <p:cNvSpPr/>
+          <p:nvPr/>
+        </p:nvSpPr>
+        <p:spPr>
+          <a:xfrm>
+            <a:off x="6767830" y="5455920"/>
+            <a:ext cx="233680" cy="304800"/>
           </a:xfrm>
           <a:prstGeom prst="rect">
             <a:avLst/>
@@ -7964,14 +8037,14 @@
       </p:sp>
       <p:sp>
         <p:nvSpPr>
-          <p:cNvPr id="117" name="Rectangle 116"/>
-          <p:cNvSpPr/>
-          <p:nvPr/>
-        </p:nvSpPr>
-        <p:spPr>
-          <a:xfrm>
-            <a:off x="6767830" y="5067993"/>
-            <a:ext cx="233680" cy="346364"/>
+          <p:cNvPr id="119" name="Rectangle 118"/>
+          <p:cNvSpPr/>
+          <p:nvPr/>
+        </p:nvSpPr>
+        <p:spPr>
+          <a:xfrm>
+            <a:off x="6767830" y="5151120"/>
+            <a:ext cx="233680" cy="304800"/>
           </a:xfrm>
           <a:prstGeom prst="rect">
             <a:avLst/>
@@ -8010,14 +8083,14 @@
       </p:sp>
       <p:sp>
         <p:nvSpPr>
-          <p:cNvPr id="118" name="Rectangle 117"/>
-          <p:cNvSpPr/>
-          <p:nvPr/>
-        </p:nvSpPr>
-        <p:spPr>
-          <a:xfrm>
-            <a:off x="6767830" y="4490720"/>
-            <a:ext cx="233680" cy="577273"/>
+          <p:cNvPr id="120" name="Rectangle 119"/>
+          <p:cNvSpPr/>
+          <p:nvPr/>
+        </p:nvSpPr>
+        <p:spPr>
+          <a:xfrm>
+            <a:off x="6767830" y="4643120"/>
+            <a:ext cx="233680" cy="508000"/>
           </a:xfrm>
           <a:prstGeom prst="rect">
             <a:avLst/>
@@ -8056,7 +8129,7 @@
       </p:sp>
       <p:sp>
         <p:nvSpPr>
-          <p:cNvPr id="119" name="Rectangle 118"/>
+          <p:cNvPr id="121" name="Rectangle 120"/>
           <p:cNvSpPr/>
           <p:nvPr/>
         </p:nvSpPr>
@@ -8100,7 +8173,7 @@
       </p:sp>
       <p:sp>
         <p:nvSpPr>
-          <p:cNvPr id="120" name="TextBox 119"/>
+          <p:cNvPr id="122" name="TextBox 121"/>
           <p:cNvSpPr txBox="1"/>
           <p:nvPr/>
         </p:nvSpPr>
@@ -8136,14 +8209,14 @@
       </p:sp>
       <p:sp>
         <p:nvSpPr>
-          <p:cNvPr id="121" name="Rectangle 120"/>
-          <p:cNvSpPr/>
-          <p:nvPr/>
-        </p:nvSpPr>
-        <p:spPr>
-          <a:xfrm>
-            <a:off x="7059930" y="5414356"/>
-            <a:ext cx="233680" cy="346364"/>
+          <p:cNvPr id="123" name="Rectangle 122"/>
+          <p:cNvSpPr/>
+          <p:nvPr/>
+        </p:nvSpPr>
+        <p:spPr>
+          <a:xfrm>
+            <a:off x="7059930" y="5455920"/>
+            <a:ext cx="233680" cy="304800"/>
           </a:xfrm>
           <a:prstGeom prst="rect">
             <a:avLst/>
@@ -8182,14 +8255,14 @@
       </p:sp>
       <p:sp>
         <p:nvSpPr>
-          <p:cNvPr id="122" name="Rectangle 121"/>
-          <p:cNvSpPr/>
-          <p:nvPr/>
-        </p:nvSpPr>
-        <p:spPr>
-          <a:xfrm>
-            <a:off x="7059930" y="5067993"/>
-            <a:ext cx="233680" cy="346364"/>
+          <p:cNvPr id="124" name="Rectangle 123"/>
+          <p:cNvSpPr/>
+          <p:nvPr/>
+        </p:nvSpPr>
+        <p:spPr>
+          <a:xfrm>
+            <a:off x="7059930" y="5151120"/>
+            <a:ext cx="233680" cy="304800"/>
           </a:xfrm>
           <a:prstGeom prst="rect">
             <a:avLst/>
@@ -8228,14 +8301,14 @@
       </p:sp>
       <p:sp>
         <p:nvSpPr>
-          <p:cNvPr id="123" name="Rectangle 122"/>
-          <p:cNvSpPr/>
-          <p:nvPr/>
-        </p:nvSpPr>
-        <p:spPr>
-          <a:xfrm>
-            <a:off x="7059930" y="4490720"/>
-            <a:ext cx="233680" cy="577273"/>
+          <p:cNvPr id="125" name="Rectangle 124"/>
+          <p:cNvSpPr/>
+          <p:nvPr/>
+        </p:nvSpPr>
+        <p:spPr>
+          <a:xfrm>
+            <a:off x="7059930" y="4643120"/>
+            <a:ext cx="233680" cy="508000"/>
           </a:xfrm>
           <a:prstGeom prst="rect">
             <a:avLst/>
@@ -8274,7 +8347,7 @@
       </p:sp>
       <p:sp>
         <p:nvSpPr>
-          <p:cNvPr id="124" name="Rectangle 123"/>
+          <p:cNvPr id="126" name="Rectangle 125"/>
           <p:cNvSpPr/>
           <p:nvPr/>
         </p:nvSpPr>
@@ -8318,7 +8391,7 @@
       </p:sp>
       <p:sp>
         <p:nvSpPr>
-          <p:cNvPr id="125" name="TextBox 124"/>
+          <p:cNvPr id="127" name="TextBox 126"/>
           <p:cNvSpPr txBox="1"/>
           <p:nvPr/>
         </p:nvSpPr>
@@ -8354,14 +8427,14 @@
       </p:sp>
       <p:sp>
         <p:nvSpPr>
-          <p:cNvPr id="126" name="Rectangle 125"/>
-          <p:cNvSpPr/>
-          <p:nvPr/>
-        </p:nvSpPr>
-        <p:spPr>
-          <a:xfrm>
-            <a:off x="7352030" y="5645265"/>
-            <a:ext cx="233680" cy="115455"/>
+          <p:cNvPr id="128" name="Rectangle 127"/>
+          <p:cNvSpPr/>
+          <p:nvPr/>
+        </p:nvSpPr>
+        <p:spPr>
+          <a:xfrm>
+            <a:off x="7352030" y="5659120"/>
+            <a:ext cx="233680" cy="101600"/>
           </a:xfrm>
           <a:prstGeom prst="rect">
             <a:avLst/>
@@ -8400,14 +8473,14 @@
       </p:sp>
       <p:sp>
         <p:nvSpPr>
-          <p:cNvPr id="127" name="Rectangle 126"/>
-          <p:cNvSpPr/>
-          <p:nvPr/>
-        </p:nvSpPr>
-        <p:spPr>
-          <a:xfrm>
-            <a:off x="7352030" y="5414356"/>
-            <a:ext cx="233680" cy="230909"/>
+          <p:cNvPr id="129" name="Rectangle 128"/>
+          <p:cNvSpPr/>
+          <p:nvPr/>
+        </p:nvSpPr>
+        <p:spPr>
+          <a:xfrm>
+            <a:off x="7352030" y="5455920"/>
+            <a:ext cx="233680" cy="203200"/>
           </a:xfrm>
           <a:prstGeom prst="rect">
             <a:avLst/>
@@ -8446,14 +8519,14 @@
       </p:sp>
       <p:sp>
         <p:nvSpPr>
-          <p:cNvPr id="128" name="Rectangle 127"/>
-          <p:cNvSpPr/>
-          <p:nvPr/>
-        </p:nvSpPr>
-        <p:spPr>
-          <a:xfrm>
-            <a:off x="7352030" y="4490720"/>
-            <a:ext cx="233680" cy="923636"/>
+          <p:cNvPr id="130" name="Rectangle 129"/>
+          <p:cNvSpPr/>
+          <p:nvPr/>
+        </p:nvSpPr>
+        <p:spPr>
+          <a:xfrm>
+            <a:off x="7352030" y="4643120"/>
+            <a:ext cx="233680" cy="812800"/>
           </a:xfrm>
           <a:prstGeom prst="rect">
             <a:avLst/>
@@ -8492,7 +8565,7 @@
       </p:sp>
       <p:sp>
         <p:nvSpPr>
-          <p:cNvPr id="129" name="Rectangle 128"/>
+          <p:cNvPr id="131" name="Rectangle 130"/>
           <p:cNvSpPr/>
           <p:nvPr/>
         </p:nvSpPr>
@@ -8536,7 +8609,7 @@
       </p:sp>
       <p:sp>
         <p:nvSpPr>
-          <p:cNvPr id="130" name="TextBox 129"/>
+          <p:cNvPr id="132" name="TextBox 131"/>
           <p:cNvSpPr txBox="1"/>
           <p:nvPr/>
         </p:nvSpPr>
@@ -8572,14 +8645,14 @@
       </p:sp>
       <p:sp>
         <p:nvSpPr>
-          <p:cNvPr id="131" name="Rectangle 130"/>
-          <p:cNvSpPr/>
-          <p:nvPr/>
-        </p:nvSpPr>
-        <p:spPr>
-          <a:xfrm>
-            <a:off x="7644130" y="5414356"/>
-            <a:ext cx="233680" cy="346364"/>
+          <p:cNvPr id="133" name="Rectangle 132"/>
+          <p:cNvSpPr/>
+          <p:nvPr/>
+        </p:nvSpPr>
+        <p:spPr>
+          <a:xfrm>
+            <a:off x="7644130" y="5455920"/>
+            <a:ext cx="233680" cy="304800"/>
           </a:xfrm>
           <a:prstGeom prst="rect">
             <a:avLst/>
@@ -8618,14 +8691,14 @@
       </p:sp>
       <p:sp>
         <p:nvSpPr>
-          <p:cNvPr id="132" name="Rectangle 131"/>
-          <p:cNvSpPr/>
-          <p:nvPr/>
-        </p:nvSpPr>
-        <p:spPr>
-          <a:xfrm>
-            <a:off x="7644130" y="5067993"/>
-            <a:ext cx="233680" cy="346364"/>
+          <p:cNvPr id="134" name="Rectangle 133"/>
+          <p:cNvSpPr/>
+          <p:nvPr/>
+        </p:nvSpPr>
+        <p:spPr>
+          <a:xfrm>
+            <a:off x="7644130" y="5151120"/>
+            <a:ext cx="233680" cy="304800"/>
           </a:xfrm>
           <a:prstGeom prst="rect">
             <a:avLst/>
@@ -8664,14 +8737,14 @@
       </p:sp>
       <p:sp>
         <p:nvSpPr>
-          <p:cNvPr id="133" name="Rectangle 132"/>
-          <p:cNvSpPr/>
-          <p:nvPr/>
-        </p:nvSpPr>
-        <p:spPr>
-          <a:xfrm>
-            <a:off x="7644130" y="4259811"/>
-            <a:ext cx="233680" cy="808182"/>
+          <p:cNvPr id="135" name="Rectangle 134"/>
+          <p:cNvSpPr/>
+          <p:nvPr/>
+        </p:nvSpPr>
+        <p:spPr>
+          <a:xfrm>
+            <a:off x="7644130" y="4439920"/>
+            <a:ext cx="233680" cy="711200"/>
           </a:xfrm>
           <a:prstGeom prst="rect">
             <a:avLst/>
@@ -8710,7 +8783,7 @@
       </p:sp>
       <p:sp>
         <p:nvSpPr>
-          <p:cNvPr id="134" name="Rectangle 133"/>
+          <p:cNvPr id="136" name="Rectangle 135"/>
           <p:cNvSpPr/>
           <p:nvPr/>
         </p:nvSpPr>
@@ -8754,7 +8827,7 @@
       </p:sp>
       <p:sp>
         <p:nvSpPr>
-          <p:cNvPr id="135" name="TextBox 134"/>
+          <p:cNvPr id="137" name="TextBox 136"/>
           <p:cNvSpPr txBox="1"/>
           <p:nvPr/>
         </p:nvSpPr>
@@ -8790,14 +8863,14 @@
       </p:sp>
       <p:sp>
         <p:nvSpPr>
-          <p:cNvPr id="136" name="Rectangle 135"/>
-          <p:cNvSpPr/>
-          <p:nvPr/>
-        </p:nvSpPr>
-        <p:spPr>
-          <a:xfrm>
-            <a:off x="7936230" y="5529811"/>
-            <a:ext cx="233680" cy="230909"/>
+          <p:cNvPr id="138" name="Rectangle 137"/>
+          <p:cNvSpPr/>
+          <p:nvPr/>
+        </p:nvSpPr>
+        <p:spPr>
+          <a:xfrm>
+            <a:off x="7936230" y="5557520"/>
+            <a:ext cx="233680" cy="203200"/>
           </a:xfrm>
           <a:prstGeom prst="rect">
             <a:avLst/>
@@ -8836,14 +8909,14 @@
       </p:sp>
       <p:sp>
         <p:nvSpPr>
-          <p:cNvPr id="137" name="Rectangle 136"/>
-          <p:cNvSpPr/>
-          <p:nvPr/>
-        </p:nvSpPr>
-        <p:spPr>
-          <a:xfrm>
-            <a:off x="7936230" y="5067993"/>
-            <a:ext cx="233680" cy="461818"/>
+          <p:cNvPr id="139" name="Rectangle 138"/>
+          <p:cNvSpPr/>
+          <p:nvPr/>
+        </p:nvSpPr>
+        <p:spPr>
+          <a:xfrm>
+            <a:off x="7936230" y="5151120"/>
+            <a:ext cx="233680" cy="406400"/>
           </a:xfrm>
           <a:prstGeom prst="rect">
             <a:avLst/>
@@ -8882,14 +8955,14 @@
       </p:sp>
       <p:sp>
         <p:nvSpPr>
-          <p:cNvPr id="138" name="Rectangle 137"/>
-          <p:cNvSpPr/>
-          <p:nvPr/>
-        </p:nvSpPr>
-        <p:spPr>
-          <a:xfrm>
-            <a:off x="7936230" y="4259811"/>
-            <a:ext cx="233680" cy="808182"/>
+          <p:cNvPr id="140" name="Rectangle 139"/>
+          <p:cNvSpPr/>
+          <p:nvPr/>
+        </p:nvSpPr>
+        <p:spPr>
+          <a:xfrm>
+            <a:off x="7936230" y="4439920"/>
+            <a:ext cx="233680" cy="711200"/>
           </a:xfrm>
           <a:prstGeom prst="rect">
             <a:avLst/>
@@ -8928,7 +9001,7 @@
       </p:sp>
       <p:sp>
         <p:nvSpPr>
-          <p:cNvPr id="139" name="Rectangle 138"/>
+          <p:cNvPr id="141" name="Rectangle 140"/>
           <p:cNvSpPr/>
           <p:nvPr/>
         </p:nvSpPr>
@@ -8972,7 +9045,7 @@
       </p:sp>
       <p:sp>
         <p:nvSpPr>
-          <p:cNvPr id="140" name="TextBox 139"/>
+          <p:cNvPr id="142" name="TextBox 141"/>
           <p:cNvSpPr txBox="1"/>
           <p:nvPr/>
         </p:nvSpPr>
@@ -9008,14 +9081,14 @@
       </p:sp>
       <p:sp>
         <p:nvSpPr>
-          <p:cNvPr id="141" name="Rectangle 140"/>
-          <p:cNvSpPr/>
-          <p:nvPr/>
-        </p:nvSpPr>
-        <p:spPr>
-          <a:xfrm>
-            <a:off x="8228330" y="5298902"/>
-            <a:ext cx="233680" cy="461818"/>
+          <p:cNvPr id="143" name="Rectangle 142"/>
+          <p:cNvSpPr/>
+          <p:nvPr/>
+        </p:nvSpPr>
+        <p:spPr>
+          <a:xfrm>
+            <a:off x="8228330" y="5354320"/>
+            <a:ext cx="233680" cy="406400"/>
           </a:xfrm>
           <a:prstGeom prst="rect">
             <a:avLst/>
@@ -9054,14 +9127,14 @@
       </p:sp>
       <p:sp>
         <p:nvSpPr>
-          <p:cNvPr id="142" name="Rectangle 141"/>
-          <p:cNvSpPr/>
-          <p:nvPr/>
-        </p:nvSpPr>
-        <p:spPr>
-          <a:xfrm>
-            <a:off x="8228330" y="4837084"/>
-            <a:ext cx="233680" cy="461818"/>
+          <p:cNvPr id="144" name="Rectangle 143"/>
+          <p:cNvSpPr/>
+          <p:nvPr/>
+        </p:nvSpPr>
+        <p:spPr>
+          <a:xfrm>
+            <a:off x="8228330" y="4947920"/>
+            <a:ext cx="233680" cy="406400"/>
           </a:xfrm>
           <a:prstGeom prst="rect">
             <a:avLst/>
@@ -9100,14 +9173,14 @@
       </p:sp>
       <p:sp>
         <p:nvSpPr>
-          <p:cNvPr id="143" name="Rectangle 142"/>
-          <p:cNvSpPr/>
-          <p:nvPr/>
-        </p:nvSpPr>
-        <p:spPr>
-          <a:xfrm>
-            <a:off x="8228330" y="4144356"/>
-            <a:ext cx="233680" cy="692727"/>
+          <p:cNvPr id="145" name="Rectangle 144"/>
+          <p:cNvSpPr/>
+          <p:nvPr/>
+        </p:nvSpPr>
+        <p:spPr>
+          <a:xfrm>
+            <a:off x="8228330" y="4338320"/>
+            <a:ext cx="233680" cy="609600"/>
           </a:xfrm>
           <a:prstGeom prst="rect">
             <a:avLst/>
@@ -9146,7 +9219,7 @@
       </p:sp>
       <p:sp>
         <p:nvSpPr>
-          <p:cNvPr id="144" name="Rectangle 143"/>
+          <p:cNvPr id="146" name="Rectangle 145"/>
           <p:cNvSpPr/>
           <p:nvPr/>
         </p:nvSpPr>
@@ -9190,7 +9263,7 @@
       </p:sp>
       <p:sp>
         <p:nvSpPr>
-          <p:cNvPr id="145" name="TextBox 144"/>
+          <p:cNvPr id="147" name="TextBox 146"/>
           <p:cNvSpPr txBox="1"/>
           <p:nvPr/>
         </p:nvSpPr>
@@ -9226,14 +9299,14 @@
       </p:sp>
       <p:sp>
         <p:nvSpPr>
-          <p:cNvPr id="146" name="Rectangle 145"/>
-          <p:cNvSpPr/>
-          <p:nvPr/>
-        </p:nvSpPr>
-        <p:spPr>
-          <a:xfrm>
-            <a:off x="8520430" y="5183447"/>
-            <a:ext cx="233680" cy="577273"/>
+          <p:cNvPr id="148" name="Rectangle 147"/>
+          <p:cNvSpPr/>
+          <p:nvPr/>
+        </p:nvSpPr>
+        <p:spPr>
+          <a:xfrm>
+            <a:off x="8520430" y="5252720"/>
+            <a:ext cx="233680" cy="508000"/>
           </a:xfrm>
           <a:prstGeom prst="rect">
             <a:avLst/>
@@ -9272,14 +9345,14 @@
       </p:sp>
       <p:sp>
         <p:nvSpPr>
-          <p:cNvPr id="147" name="Rectangle 146"/>
-          <p:cNvSpPr/>
-          <p:nvPr/>
-        </p:nvSpPr>
-        <p:spPr>
-          <a:xfrm>
-            <a:off x="8520430" y="4837084"/>
-            <a:ext cx="233680" cy="346364"/>
+          <p:cNvPr id="149" name="Rectangle 148"/>
+          <p:cNvSpPr/>
+          <p:nvPr/>
+        </p:nvSpPr>
+        <p:spPr>
+          <a:xfrm>
+            <a:off x="8520430" y="4947920"/>
+            <a:ext cx="233680" cy="304800"/>
           </a:xfrm>
           <a:prstGeom prst="rect">
             <a:avLst/>
@@ -9318,14 +9391,14 @@
       </p:sp>
       <p:sp>
         <p:nvSpPr>
-          <p:cNvPr id="148" name="Rectangle 147"/>
-          <p:cNvSpPr/>
-          <p:nvPr/>
-        </p:nvSpPr>
-        <p:spPr>
-          <a:xfrm>
-            <a:off x="8520430" y="4144356"/>
-            <a:ext cx="233680" cy="692727"/>
+          <p:cNvPr id="150" name="Rectangle 149"/>
+          <p:cNvSpPr/>
+          <p:nvPr/>
+        </p:nvSpPr>
+        <p:spPr>
+          <a:xfrm>
+            <a:off x="8520430" y="4338320"/>
+            <a:ext cx="233680" cy="609600"/>
           </a:xfrm>
           <a:prstGeom prst="rect">
             <a:avLst/>
@@ -9364,7 +9437,7 @@
       </p:sp>
       <p:sp>
         <p:nvSpPr>
-          <p:cNvPr id="149" name="Rectangle 148"/>
+          <p:cNvPr id="151" name="Rectangle 150"/>
           <p:cNvSpPr/>
           <p:nvPr/>
         </p:nvSpPr>
@@ -9408,7 +9481,7 @@
       </p:sp>
       <p:sp>
         <p:nvSpPr>
-          <p:cNvPr id="150" name="TextBox 149"/>
+          <p:cNvPr id="152" name="TextBox 151"/>
           <p:cNvSpPr txBox="1"/>
           <p:nvPr/>
         </p:nvSpPr>
@@ -9444,14 +9517,14 @@
       </p:sp>
       <p:sp>
         <p:nvSpPr>
-          <p:cNvPr id="151" name="Rectangle 150"/>
-          <p:cNvSpPr/>
-          <p:nvPr/>
-        </p:nvSpPr>
-        <p:spPr>
-          <a:xfrm>
-            <a:off x="8812530" y="5298902"/>
-            <a:ext cx="233680" cy="461818"/>
+          <p:cNvPr id="153" name="Rectangle 152"/>
+          <p:cNvSpPr/>
+          <p:nvPr/>
+        </p:nvSpPr>
+        <p:spPr>
+          <a:xfrm>
+            <a:off x="8812530" y="5354320"/>
+            <a:ext cx="233680" cy="406400"/>
           </a:xfrm>
           <a:prstGeom prst="rect">
             <a:avLst/>
@@ -9490,14 +9563,14 @@
       </p:sp>
       <p:sp>
         <p:nvSpPr>
-          <p:cNvPr id="152" name="Rectangle 151"/>
-          <p:cNvSpPr/>
-          <p:nvPr/>
-        </p:nvSpPr>
-        <p:spPr>
-          <a:xfrm>
-            <a:off x="8812530" y="4952538"/>
-            <a:ext cx="233680" cy="346364"/>
+          <p:cNvPr id="154" name="Rectangle 153"/>
+          <p:cNvSpPr/>
+          <p:nvPr/>
+        </p:nvSpPr>
+        <p:spPr>
+          <a:xfrm>
+            <a:off x="8812530" y="5049520"/>
+            <a:ext cx="233680" cy="304800"/>
           </a:xfrm>
           <a:prstGeom prst="rect">
             <a:avLst/>
@@ -9536,14 +9609,14 @@
       </p:sp>
       <p:sp>
         <p:nvSpPr>
-          <p:cNvPr id="153" name="Rectangle 152"/>
-          <p:cNvSpPr/>
-          <p:nvPr/>
-        </p:nvSpPr>
-        <p:spPr>
-          <a:xfrm>
-            <a:off x="8812530" y="4028902"/>
-            <a:ext cx="233680" cy="923636"/>
+          <p:cNvPr id="155" name="Rectangle 154"/>
+          <p:cNvSpPr/>
+          <p:nvPr/>
+        </p:nvSpPr>
+        <p:spPr>
+          <a:xfrm>
+            <a:off x="8812530" y="4236720"/>
+            <a:ext cx="233680" cy="812800"/>
           </a:xfrm>
           <a:prstGeom prst="rect">
             <a:avLst/>
@@ -9582,7 +9655,7 @@
       </p:sp>
       <p:sp>
         <p:nvSpPr>
-          <p:cNvPr id="154" name="Rectangle 153"/>
+          <p:cNvPr id="156" name="Rectangle 155"/>
           <p:cNvSpPr/>
           <p:nvPr/>
         </p:nvSpPr>
@@ -9626,7 +9699,7 @@
       </p:sp>
       <p:sp>
         <p:nvSpPr>
-          <p:cNvPr id="155" name="TextBox 154"/>
+          <p:cNvPr id="157" name="TextBox 156"/>
           <p:cNvSpPr txBox="1"/>
           <p:nvPr/>
         </p:nvSpPr>
@@ -9662,14 +9735,14 @@
       </p:sp>
       <p:sp>
         <p:nvSpPr>
-          <p:cNvPr id="156" name="Rectangle 155"/>
-          <p:cNvSpPr/>
-          <p:nvPr/>
-        </p:nvSpPr>
-        <p:spPr>
-          <a:xfrm>
-            <a:off x="9104630" y="5298902"/>
-            <a:ext cx="233680" cy="461818"/>
+          <p:cNvPr id="158" name="Rectangle 157"/>
+          <p:cNvSpPr/>
+          <p:nvPr/>
+        </p:nvSpPr>
+        <p:spPr>
+          <a:xfrm>
+            <a:off x="9104630" y="5354320"/>
+            <a:ext cx="233680" cy="406400"/>
           </a:xfrm>
           <a:prstGeom prst="rect">
             <a:avLst/>
@@ -9708,14 +9781,14 @@
       </p:sp>
       <p:sp>
         <p:nvSpPr>
-          <p:cNvPr id="157" name="Rectangle 156"/>
-          <p:cNvSpPr/>
-          <p:nvPr/>
-        </p:nvSpPr>
-        <p:spPr>
-          <a:xfrm>
-            <a:off x="9104630" y="4721629"/>
-            <a:ext cx="233680" cy="577273"/>
+          <p:cNvPr id="159" name="Rectangle 158"/>
+          <p:cNvSpPr/>
+          <p:nvPr/>
+        </p:nvSpPr>
+        <p:spPr>
+          <a:xfrm>
+            <a:off x="9104630" y="4846320"/>
+            <a:ext cx="233680" cy="508000"/>
           </a:xfrm>
           <a:prstGeom prst="rect">
             <a:avLst/>
@@ -9754,14 +9827,14 @@
       </p:sp>
       <p:sp>
         <p:nvSpPr>
-          <p:cNvPr id="158" name="Rectangle 157"/>
-          <p:cNvSpPr/>
-          <p:nvPr/>
-        </p:nvSpPr>
-        <p:spPr>
-          <a:xfrm>
-            <a:off x="9104630" y="3913447"/>
-            <a:ext cx="233680" cy="808182"/>
+          <p:cNvPr id="160" name="Rectangle 159"/>
+          <p:cNvSpPr/>
+          <p:nvPr/>
+        </p:nvSpPr>
+        <p:spPr>
+          <a:xfrm>
+            <a:off x="9104630" y="4135120"/>
+            <a:ext cx="233680" cy="711200"/>
           </a:xfrm>
           <a:prstGeom prst="rect">
             <a:avLst/>
@@ -9800,7 +9873,7 @@
       </p:sp>
       <p:sp>
         <p:nvSpPr>
-          <p:cNvPr id="159" name="Rectangle 158"/>
+          <p:cNvPr id="161" name="Rectangle 160"/>
           <p:cNvSpPr/>
           <p:nvPr/>
         </p:nvSpPr>
@@ -9844,7 +9917,7 @@
       </p:sp>
       <p:sp>
         <p:nvSpPr>
-          <p:cNvPr id="160" name="TextBox 159"/>
+          <p:cNvPr id="162" name="TextBox 161"/>
           <p:cNvSpPr txBox="1"/>
           <p:nvPr/>
         </p:nvSpPr>
@@ -9880,14 +9953,14 @@
       </p:sp>
       <p:sp>
         <p:nvSpPr>
-          <p:cNvPr id="161" name="Rectangle 160"/>
-          <p:cNvSpPr/>
-          <p:nvPr/>
-        </p:nvSpPr>
-        <p:spPr>
-          <a:xfrm>
-            <a:off x="9396730" y="5183447"/>
-            <a:ext cx="233680" cy="577273"/>
+          <p:cNvPr id="163" name="Rectangle 162"/>
+          <p:cNvSpPr/>
+          <p:nvPr/>
+        </p:nvSpPr>
+        <p:spPr>
+          <a:xfrm>
+            <a:off x="9396730" y="5252720"/>
+            <a:ext cx="233680" cy="508000"/>
           </a:xfrm>
           <a:prstGeom prst="rect">
             <a:avLst/>
@@ -9926,14 +9999,14 @@
       </p:sp>
       <p:sp>
         <p:nvSpPr>
-          <p:cNvPr id="162" name="Rectangle 161"/>
-          <p:cNvSpPr/>
-          <p:nvPr/>
-        </p:nvSpPr>
-        <p:spPr>
-          <a:xfrm>
-            <a:off x="9396730" y="4375265"/>
-            <a:ext cx="233680" cy="808182"/>
+          <p:cNvPr id="164" name="Rectangle 163"/>
+          <p:cNvSpPr/>
+          <p:nvPr/>
+        </p:nvSpPr>
+        <p:spPr>
+          <a:xfrm>
+            <a:off x="9396730" y="4541520"/>
+            <a:ext cx="233680" cy="711200"/>
           </a:xfrm>
           <a:prstGeom prst="rect">
             <a:avLst/>
@@ -9972,14 +10045,14 @@
       </p:sp>
       <p:sp>
         <p:nvSpPr>
-          <p:cNvPr id="163" name="Rectangle 162"/>
-          <p:cNvSpPr/>
-          <p:nvPr/>
-        </p:nvSpPr>
-        <p:spPr>
-          <a:xfrm>
-            <a:off x="9396730" y="3567084"/>
-            <a:ext cx="233680" cy="808182"/>
+          <p:cNvPr id="165" name="Rectangle 164"/>
+          <p:cNvSpPr/>
+          <p:nvPr/>
+        </p:nvSpPr>
+        <p:spPr>
+          <a:xfrm>
+            <a:off x="9396730" y="3830320"/>
+            <a:ext cx="233680" cy="711200"/>
           </a:xfrm>
           <a:prstGeom prst="rect">
             <a:avLst/>
@@ -10018,7 +10091,7 @@
       </p:sp>
       <p:sp>
         <p:nvSpPr>
-          <p:cNvPr id="164" name="Rectangle 163"/>
+          <p:cNvPr id="166" name="Rectangle 165"/>
           <p:cNvSpPr/>
           <p:nvPr/>
         </p:nvSpPr>
@@ -10062,7 +10135,7 @@
       </p:sp>
       <p:sp>
         <p:nvSpPr>
-          <p:cNvPr id="165" name="TextBox 164"/>
+          <p:cNvPr id="167" name="TextBox 166"/>
           <p:cNvSpPr txBox="1"/>
           <p:nvPr/>
         </p:nvSpPr>
@@ -10098,14 +10171,14 @@
       </p:sp>
       <p:sp>
         <p:nvSpPr>
-          <p:cNvPr id="166" name="Rectangle 165"/>
-          <p:cNvSpPr/>
-          <p:nvPr/>
-        </p:nvSpPr>
-        <p:spPr>
-          <a:xfrm>
-            <a:off x="9688830" y="5529811"/>
-            <a:ext cx="233680" cy="230909"/>
+          <p:cNvPr id="168" name="Rectangle 167"/>
+          <p:cNvSpPr/>
+          <p:nvPr/>
+        </p:nvSpPr>
+        <p:spPr>
+          <a:xfrm>
+            <a:off x="9688830" y="5557520"/>
+            <a:ext cx="233680" cy="203200"/>
           </a:xfrm>
           <a:prstGeom prst="rect">
             <a:avLst/>
@@ -10144,14 +10217,14 @@
       </p:sp>
       <p:sp>
         <p:nvSpPr>
-          <p:cNvPr id="167" name="Rectangle 166"/>
-          <p:cNvSpPr/>
-          <p:nvPr/>
-        </p:nvSpPr>
-        <p:spPr>
-          <a:xfrm>
-            <a:off x="9688830" y="4952538"/>
-            <a:ext cx="233680" cy="577273"/>
+          <p:cNvPr id="169" name="Rectangle 168"/>
+          <p:cNvSpPr/>
+          <p:nvPr/>
+        </p:nvSpPr>
+        <p:spPr>
+          <a:xfrm>
+            <a:off x="9688830" y="5049520"/>
+            <a:ext cx="233680" cy="508000"/>
           </a:xfrm>
           <a:prstGeom prst="rect">
             <a:avLst/>
@@ -10190,14 +10263,14 @@
       </p:sp>
       <p:sp>
         <p:nvSpPr>
-          <p:cNvPr id="168" name="Rectangle 167"/>
-          <p:cNvSpPr/>
-          <p:nvPr/>
-        </p:nvSpPr>
-        <p:spPr>
-          <a:xfrm>
-            <a:off x="9688830" y="3451629"/>
-            <a:ext cx="233680" cy="1500909"/>
+          <p:cNvPr id="170" name="Rectangle 169"/>
+          <p:cNvSpPr/>
+          <p:nvPr/>
+        </p:nvSpPr>
+        <p:spPr>
+          <a:xfrm>
+            <a:off x="9688830" y="3728720"/>
+            <a:ext cx="233680" cy="1320800"/>
           </a:xfrm>
           <a:prstGeom prst="rect">
             <a:avLst/>
@@ -10236,7 +10309,7 @@
       </p:sp>
       <p:sp>
         <p:nvSpPr>
-          <p:cNvPr id="169" name="Rectangle 168"/>
+          <p:cNvPr id="171" name="Rectangle 170"/>
           <p:cNvSpPr/>
           <p:nvPr/>
         </p:nvSpPr>
@@ -10280,7 +10353,7 @@
       </p:sp>
       <p:sp>
         <p:nvSpPr>
-          <p:cNvPr id="170" name="TextBox 169"/>
+          <p:cNvPr id="172" name="TextBox 171"/>
           <p:cNvSpPr txBox="1"/>
           <p:nvPr/>
         </p:nvSpPr>
@@ -10316,14 +10389,14 @@
       </p:sp>
       <p:sp>
         <p:nvSpPr>
-          <p:cNvPr id="171" name="Rectangle 170"/>
-          <p:cNvSpPr/>
-          <p:nvPr/>
-        </p:nvSpPr>
-        <p:spPr>
-          <a:xfrm>
-            <a:off x="9980930" y="5183447"/>
-            <a:ext cx="233680" cy="577273"/>
+          <p:cNvPr id="173" name="Rectangle 172"/>
+          <p:cNvSpPr/>
+          <p:nvPr/>
+        </p:nvSpPr>
+        <p:spPr>
+          <a:xfrm>
+            <a:off x="9980930" y="5252720"/>
+            <a:ext cx="233680" cy="508000"/>
           </a:xfrm>
           <a:prstGeom prst="rect">
             <a:avLst/>
@@ -10362,14 +10435,14 @@
       </p:sp>
       <p:sp>
         <p:nvSpPr>
-          <p:cNvPr id="172" name="Rectangle 171"/>
-          <p:cNvSpPr/>
-          <p:nvPr/>
-        </p:nvSpPr>
-        <p:spPr>
-          <a:xfrm>
-            <a:off x="9980930" y="4490720"/>
-            <a:ext cx="233680" cy="692727"/>
+          <p:cNvPr id="174" name="Rectangle 173"/>
+          <p:cNvSpPr/>
+          <p:nvPr/>
+        </p:nvSpPr>
+        <p:spPr>
+          <a:xfrm>
+            <a:off x="9980930" y="4643120"/>
+            <a:ext cx="233680" cy="609600"/>
           </a:xfrm>
           <a:prstGeom prst="rect">
             <a:avLst/>
@@ -10408,14 +10481,14 @@
       </p:sp>
       <p:sp>
         <p:nvSpPr>
-          <p:cNvPr id="173" name="Rectangle 172"/>
-          <p:cNvSpPr/>
-          <p:nvPr/>
-        </p:nvSpPr>
-        <p:spPr>
-          <a:xfrm>
-            <a:off x="9980930" y="2989811"/>
-            <a:ext cx="233680" cy="1500909"/>
+          <p:cNvPr id="175" name="Rectangle 174"/>
+          <p:cNvSpPr/>
+          <p:nvPr/>
+        </p:nvSpPr>
+        <p:spPr>
+          <a:xfrm>
+            <a:off x="9980930" y="3322320"/>
+            <a:ext cx="233680" cy="1320800"/>
           </a:xfrm>
           <a:prstGeom prst="rect">
             <a:avLst/>
@@ -10454,7 +10527,7 @@
       </p:sp>
       <p:sp>
         <p:nvSpPr>
-          <p:cNvPr id="174" name="Rectangle 173"/>
+          <p:cNvPr id="176" name="Rectangle 175"/>
           <p:cNvSpPr/>
           <p:nvPr/>
         </p:nvSpPr>
@@ -10498,7 +10571,7 @@
       </p:sp>
       <p:sp>
         <p:nvSpPr>
-          <p:cNvPr id="175" name="TextBox 174"/>
+          <p:cNvPr id="177" name="TextBox 176"/>
           <p:cNvSpPr txBox="1"/>
           <p:nvPr/>
         </p:nvSpPr>
@@ -10534,14 +10607,14 @@
       </p:sp>
       <p:sp>
         <p:nvSpPr>
-          <p:cNvPr id="176" name="Rectangle 175"/>
-          <p:cNvSpPr/>
-          <p:nvPr/>
-        </p:nvSpPr>
-        <p:spPr>
-          <a:xfrm>
-            <a:off x="10273030" y="5414356"/>
-            <a:ext cx="233680" cy="346364"/>
+          <p:cNvPr id="178" name="Rectangle 177"/>
+          <p:cNvSpPr/>
+          <p:nvPr/>
+        </p:nvSpPr>
+        <p:spPr>
+          <a:xfrm>
+            <a:off x="10273030" y="5455920"/>
+            <a:ext cx="233680" cy="304800"/>
           </a:xfrm>
           <a:prstGeom prst="rect">
             <a:avLst/>
@@ -10580,14 +10653,14 @@
       </p:sp>
       <p:sp>
         <p:nvSpPr>
-          <p:cNvPr id="177" name="Rectangle 176"/>
-          <p:cNvSpPr/>
-          <p:nvPr/>
-        </p:nvSpPr>
-        <p:spPr>
-          <a:xfrm>
-            <a:off x="10273030" y="4606175"/>
-            <a:ext cx="233680" cy="808182"/>
+          <p:cNvPr id="179" name="Rectangle 178"/>
+          <p:cNvSpPr/>
+          <p:nvPr/>
+        </p:nvSpPr>
+        <p:spPr>
+          <a:xfrm>
+            <a:off x="10273030" y="4744720"/>
+            <a:ext cx="233680" cy="711200"/>
           </a:xfrm>
           <a:prstGeom prst="rect">
             <a:avLst/>
@@ -10626,14 +10699,14 @@
       </p:sp>
       <p:sp>
         <p:nvSpPr>
-          <p:cNvPr id="178" name="Rectangle 177"/>
-          <p:cNvSpPr/>
-          <p:nvPr/>
-        </p:nvSpPr>
-        <p:spPr>
-          <a:xfrm>
-            <a:off x="10273030" y="2989811"/>
-            <a:ext cx="233680" cy="1616364"/>
+          <p:cNvPr id="180" name="Rectangle 179"/>
+          <p:cNvSpPr/>
+          <p:nvPr/>
+        </p:nvSpPr>
+        <p:spPr>
+          <a:xfrm>
+            <a:off x="10273030" y="3322320"/>
+            <a:ext cx="233680" cy="1422400"/>
           </a:xfrm>
           <a:prstGeom prst="rect">
             <a:avLst/>
@@ -10672,7 +10745,7 @@
       </p:sp>
       <p:sp>
         <p:nvSpPr>
-          <p:cNvPr id="179" name="Rectangle 178"/>
+          <p:cNvPr id="181" name="Rectangle 180"/>
           <p:cNvSpPr/>
           <p:nvPr/>
         </p:nvSpPr>
@@ -10716,7 +10789,7 @@
       </p:sp>
       <p:sp>
         <p:nvSpPr>
-          <p:cNvPr id="180" name="TextBox 179"/>
+          <p:cNvPr id="182" name="TextBox 181"/>
           <p:cNvSpPr txBox="1"/>
           <p:nvPr/>
         </p:nvSpPr>
@@ -10752,14 +10825,14 @@
       </p:sp>
       <p:sp>
         <p:nvSpPr>
-          <p:cNvPr id="181" name="Rectangle 180"/>
-          <p:cNvSpPr/>
-          <p:nvPr/>
-        </p:nvSpPr>
-        <p:spPr>
-          <a:xfrm>
-            <a:off x="10565130" y="4952538"/>
-            <a:ext cx="233680" cy="808182"/>
+          <p:cNvPr id="183" name="Rectangle 182"/>
+          <p:cNvSpPr/>
+          <p:nvPr/>
+        </p:nvSpPr>
+        <p:spPr>
+          <a:xfrm>
+            <a:off x="10565130" y="5049520"/>
+            <a:ext cx="233680" cy="711200"/>
           </a:xfrm>
           <a:prstGeom prst="rect">
             <a:avLst/>
@@ -10798,14 +10871,14 @@
       </p:sp>
       <p:sp>
         <p:nvSpPr>
-          <p:cNvPr id="182" name="Rectangle 181"/>
-          <p:cNvSpPr/>
-          <p:nvPr/>
-        </p:nvSpPr>
-        <p:spPr>
-          <a:xfrm>
-            <a:off x="10565130" y="4144356"/>
-            <a:ext cx="233680" cy="808182"/>
+          <p:cNvPr id="184" name="Rectangle 183"/>
+          <p:cNvSpPr/>
+          <p:nvPr/>
+        </p:nvSpPr>
+        <p:spPr>
+          <a:xfrm>
+            <a:off x="10565130" y="4338320"/>
+            <a:ext cx="233680" cy="711200"/>
           </a:xfrm>
           <a:prstGeom prst="rect">
             <a:avLst/>
@@ -10844,14 +10917,14 @@
       </p:sp>
       <p:sp>
         <p:nvSpPr>
-          <p:cNvPr id="183" name="Rectangle 182"/>
-          <p:cNvSpPr/>
-          <p:nvPr/>
-        </p:nvSpPr>
-        <p:spPr>
-          <a:xfrm>
-            <a:off x="10565130" y="2758902"/>
-            <a:ext cx="233680" cy="1385455"/>
+          <p:cNvPr id="185" name="Rectangle 184"/>
+          <p:cNvSpPr/>
+          <p:nvPr/>
+        </p:nvSpPr>
+        <p:spPr>
+          <a:xfrm>
+            <a:off x="10565130" y="3119120"/>
+            <a:ext cx="233680" cy="1219200"/>
           </a:xfrm>
           <a:prstGeom prst="rect">
             <a:avLst/>
@@ -10890,7 +10963,7 @@
       </p:sp>
       <p:sp>
         <p:nvSpPr>
-          <p:cNvPr id="184" name="Rectangle 183"/>
+          <p:cNvPr id="186" name="Rectangle 185"/>
           <p:cNvSpPr/>
           <p:nvPr/>
         </p:nvSpPr>
@@ -10934,7 +11007,7 @@
       </p:sp>
       <p:sp>
         <p:nvSpPr>
-          <p:cNvPr id="185" name="TextBox 184"/>
+          <p:cNvPr id="187" name="TextBox 186"/>
           <p:cNvSpPr txBox="1"/>
           <p:nvPr/>
         </p:nvSpPr>
@@ -10970,14 +11043,14 @@
       </p:sp>
       <p:sp>
         <p:nvSpPr>
-          <p:cNvPr id="186" name="Rectangle 185"/>
-          <p:cNvSpPr/>
-          <p:nvPr/>
-        </p:nvSpPr>
-        <p:spPr>
-          <a:xfrm>
-            <a:off x="10857230" y="5183447"/>
-            <a:ext cx="233680" cy="577273"/>
+          <p:cNvPr id="188" name="Rectangle 187"/>
+          <p:cNvSpPr/>
+          <p:nvPr/>
+        </p:nvSpPr>
+        <p:spPr>
+          <a:xfrm>
+            <a:off x="10857230" y="5252720"/>
+            <a:ext cx="233680" cy="508000"/>
           </a:xfrm>
           <a:prstGeom prst="rect">
             <a:avLst/>
@@ -11016,14 +11089,14 @@
       </p:sp>
       <p:sp>
         <p:nvSpPr>
-          <p:cNvPr id="187" name="Rectangle 186"/>
-          <p:cNvSpPr/>
-          <p:nvPr/>
-        </p:nvSpPr>
-        <p:spPr>
-          <a:xfrm>
-            <a:off x="10857230" y="4375265"/>
-            <a:ext cx="233680" cy="808182"/>
+          <p:cNvPr id="189" name="Rectangle 188"/>
+          <p:cNvSpPr/>
+          <p:nvPr/>
+        </p:nvSpPr>
+        <p:spPr>
+          <a:xfrm>
+            <a:off x="10857230" y="4541520"/>
+            <a:ext cx="233680" cy="711200"/>
           </a:xfrm>
           <a:prstGeom prst="rect">
             <a:avLst/>
@@ -11062,14 +11135,14 @@
       </p:sp>
       <p:sp>
         <p:nvSpPr>
-          <p:cNvPr id="188" name="Rectangle 187"/>
-          <p:cNvSpPr/>
-          <p:nvPr/>
-        </p:nvSpPr>
-        <p:spPr>
-          <a:xfrm>
-            <a:off x="10857230" y="2297084"/>
-            <a:ext cx="233680" cy="2078182"/>
+          <p:cNvPr id="190" name="Rectangle 189"/>
+          <p:cNvSpPr/>
+          <p:nvPr/>
+        </p:nvSpPr>
+        <p:spPr>
+          <a:xfrm>
+            <a:off x="10857230" y="2712720"/>
+            <a:ext cx="233680" cy="1828800"/>
           </a:xfrm>
           <a:prstGeom prst="rect">
             <a:avLst/>
@@ -11108,7 +11181,7 @@
       </p:sp>
       <p:sp>
         <p:nvSpPr>
-          <p:cNvPr id="189" name="Rectangle 188"/>
+          <p:cNvPr id="191" name="Rectangle 190"/>
           <p:cNvSpPr/>
           <p:nvPr/>
         </p:nvSpPr>
@@ -11152,7 +11225,7 @@
       </p:sp>
       <p:sp>
         <p:nvSpPr>
-          <p:cNvPr id="190" name="TextBox 189"/>
+          <p:cNvPr id="192" name="TextBox 191"/>
           <p:cNvSpPr txBox="1"/>
           <p:nvPr/>
         </p:nvSpPr>
@@ -11188,14 +11261,14 @@
       </p:sp>
       <p:sp>
         <p:nvSpPr>
-          <p:cNvPr id="191" name="Rectangle 190"/>
-          <p:cNvSpPr/>
-          <p:nvPr/>
-        </p:nvSpPr>
-        <p:spPr>
-          <a:xfrm>
-            <a:off x="11149330" y="4837084"/>
-            <a:ext cx="233680" cy="923636"/>
+          <p:cNvPr id="193" name="Rectangle 192"/>
+          <p:cNvSpPr/>
+          <p:nvPr/>
+        </p:nvSpPr>
+        <p:spPr>
+          <a:xfrm>
+            <a:off x="11149330" y="4947920"/>
+            <a:ext cx="233680" cy="812800"/>
           </a:xfrm>
           <a:prstGeom prst="rect">
             <a:avLst/>
@@ -11234,14 +11307,14 @@
       </p:sp>
       <p:sp>
         <p:nvSpPr>
-          <p:cNvPr id="192" name="Rectangle 191"/>
-          <p:cNvSpPr/>
-          <p:nvPr/>
-        </p:nvSpPr>
-        <p:spPr>
-          <a:xfrm>
-            <a:off x="11149330" y="3797993"/>
-            <a:ext cx="233680" cy="1039091"/>
+          <p:cNvPr id="194" name="Rectangle 193"/>
+          <p:cNvSpPr/>
+          <p:nvPr/>
+        </p:nvSpPr>
+        <p:spPr>
+          <a:xfrm>
+            <a:off x="11149330" y="4033520"/>
+            <a:ext cx="233680" cy="914400"/>
           </a:xfrm>
           <a:prstGeom prst="rect">
             <a:avLst/>
@@ -11280,14 +11353,14 @@
       </p:sp>
       <p:sp>
         <p:nvSpPr>
-          <p:cNvPr id="193" name="Rectangle 192"/>
-          <p:cNvSpPr/>
-          <p:nvPr/>
-        </p:nvSpPr>
-        <p:spPr>
-          <a:xfrm>
-            <a:off x="11149330" y="1604356"/>
-            <a:ext cx="233680" cy="2193636"/>
+          <p:cNvPr id="195" name="Rectangle 194"/>
+          <p:cNvSpPr/>
+          <p:nvPr/>
+        </p:nvSpPr>
+        <p:spPr>
+          <a:xfrm>
+            <a:off x="11149330" y="2103120"/>
+            <a:ext cx="233680" cy="1930400"/>
           </a:xfrm>
           <a:prstGeom prst="rect">
             <a:avLst/>
@@ -11326,7 +11399,7 @@
       </p:sp>
       <p:sp>
         <p:nvSpPr>
-          <p:cNvPr id="194" name="Rectangle 193"/>
+          <p:cNvPr id="196" name="Rectangle 195"/>
           <p:cNvSpPr/>
           <p:nvPr/>
         </p:nvSpPr>
@@ -11370,7 +11443,7 @@
       </p:sp>
       <p:sp>
         <p:nvSpPr>
-          <p:cNvPr id="195" name="TextBox 194"/>
+          <p:cNvPr id="197" name="TextBox 196"/>
           <p:cNvSpPr txBox="1"/>
           <p:nvPr/>
         </p:nvSpPr>
@@ -11406,7 +11479,7 @@
       </p:sp>
       <p:cxnSp>
         <p:nvCxnSpPr>
-          <p:cNvPr id="196" name="Connector 195"/>
+          <p:cNvPr id="198" name="Connector 197"/>
           <p:cNvCxnSpPr/>
           <p:nvPr/>
         </p:nvCxnSpPr>
@@ -11442,13 +11515,13 @@
       </p:cxnSp>
       <p:sp>
         <p:nvSpPr>
-          <p:cNvPr id="197" name="Rectangle 196"/>
-          <p:cNvSpPr/>
-          <p:nvPr/>
-        </p:nvSpPr>
-        <p:spPr>
-          <a:xfrm>
-            <a:off x="10607040" y="731520"/>
+          <p:cNvPr id="199" name="Rectangle 198"/>
+          <p:cNvSpPr/>
+          <p:nvPr/>
+        </p:nvSpPr>
+        <p:spPr>
+          <a:xfrm>
+            <a:off x="10789920" y="731520"/>
             <a:ext cx="182880" cy="128016"/>
           </a:xfrm>
           <a:prstGeom prst="rect">
@@ -11486,14 +11559,14 @@
       </p:sp>
       <p:sp>
         <p:nvSpPr>
-          <p:cNvPr id="198" name="TextBox 197"/>
+          <p:cNvPr id="200" name="TextBox 199"/>
           <p:cNvSpPr txBox="1"/>
           <p:nvPr/>
         </p:nvSpPr>
         <p:spPr>
           <a:xfrm>
-            <a:off x="10835640" y="713232"/>
-            <a:ext cx="548640" cy="182880"/>
+            <a:off x="11018520" y="713232"/>
+            <a:ext cx="731520" cy="182880"/>
           </a:xfrm>
           <a:prstGeom prst="rect">
             <a:avLst/>
@@ -11509,7 +11582,7 @@
           <a:p>
             <a:pPr algn="l"/>
             <a:r>
-              <a:rPr sz="900" b="0" i="0">
+              <a:rPr sz="900" b="1" i="0">
                 <a:solidFill>
                   <a:srgbClr val="222222"/>
                 </a:solidFill>
@@ -11522,13 +11595,13 @@
       </p:sp>
       <p:sp>
         <p:nvSpPr>
-          <p:cNvPr id="199" name="Rectangle 198"/>
-          <p:cNvSpPr/>
-          <p:nvPr/>
-        </p:nvSpPr>
-        <p:spPr>
-          <a:xfrm>
-            <a:off x="10607040" y="950976"/>
+          <p:cNvPr id="201" name="Rectangle 200"/>
+          <p:cNvSpPr/>
+          <p:nvPr/>
+        </p:nvSpPr>
+        <p:spPr>
+          <a:xfrm>
+            <a:off x="10789920" y="950976"/>
             <a:ext cx="182880" cy="128016"/>
           </a:xfrm>
           <a:prstGeom prst="rect">
@@ -11566,14 +11639,14 @@
       </p:sp>
       <p:sp>
         <p:nvSpPr>
-          <p:cNvPr id="200" name="TextBox 199"/>
+          <p:cNvPr id="202" name="TextBox 201"/>
           <p:cNvSpPr txBox="1"/>
           <p:nvPr/>
         </p:nvSpPr>
         <p:spPr>
           <a:xfrm>
-            <a:off x="10835640" y="932688"/>
-            <a:ext cx="548640" cy="182880"/>
+            <a:off x="11018520" y="932688"/>
+            <a:ext cx="731520" cy="182880"/>
           </a:xfrm>
           <a:prstGeom prst="rect">
             <a:avLst/>
@@ -11589,7 +11662,7 @@
           <a:p>
             <a:pPr algn="l"/>
             <a:r>
-              <a:rPr sz="900" b="0" i="0">
+              <a:rPr sz="900" b="1" i="0">
                 <a:solidFill>
                   <a:srgbClr val="222222"/>
                 </a:solidFill>
@@ -11602,13 +11675,13 @@
       </p:sp>
       <p:sp>
         <p:nvSpPr>
-          <p:cNvPr id="201" name="Rectangle 200"/>
-          <p:cNvSpPr/>
-          <p:nvPr/>
-        </p:nvSpPr>
-        <p:spPr>
-          <a:xfrm>
-            <a:off x="10607040" y="1170432"/>
+          <p:cNvPr id="203" name="Rectangle 202"/>
+          <p:cNvSpPr/>
+          <p:nvPr/>
+        </p:nvSpPr>
+        <p:spPr>
+          <a:xfrm>
+            <a:off x="10789920" y="1170432"/>
             <a:ext cx="182880" cy="128016"/>
           </a:xfrm>
           <a:prstGeom prst="rect">
@@ -11646,14 +11719,14 @@
       </p:sp>
       <p:sp>
         <p:nvSpPr>
-          <p:cNvPr id="202" name="TextBox 201"/>
+          <p:cNvPr id="204" name="TextBox 203"/>
           <p:cNvSpPr txBox="1"/>
           <p:nvPr/>
         </p:nvSpPr>
         <p:spPr>
           <a:xfrm>
-            <a:off x="10835640" y="1152143"/>
-            <a:ext cx="548640" cy="182880"/>
+            <a:off x="11018520" y="1152143"/>
+            <a:ext cx="731520" cy="182880"/>
           </a:xfrm>
           <a:prstGeom prst="rect">
             <a:avLst/>
@@ -11669,7 +11742,7 @@
           <a:p>
             <a:pPr algn="l"/>
             <a:r>
-              <a:rPr sz="900" b="0" i="0">
+              <a:rPr sz="900" b="1" i="0">
                 <a:solidFill>
                   <a:srgbClr val="222222"/>
                 </a:solidFill>
@@ -11682,167 +11755,7 @@
       </p:sp>
       <p:sp>
         <p:nvSpPr>
-          <p:cNvPr id="203" name="Rectangle 202"/>
-          <p:cNvSpPr/>
-          <p:nvPr/>
-        </p:nvSpPr>
-        <p:spPr>
-          <a:xfrm>
-            <a:off x="10607040" y="1508760"/>
-            <a:ext cx="182880" cy="109728"/>
-          </a:xfrm>
-          <a:prstGeom prst="rect">
-            <a:avLst/>
-          </a:prstGeom>
-          <a:solidFill>
-            <a:srgbClr val="0A7D6E"/>
-          </a:solidFill>
-          <a:ln>
-            <a:noFill/>
-          </a:ln>
-          <a:effectLst/>
-        </p:spPr>
-        <p:style>
-          <a:lnRef idx="1">
-            <a:schemeClr val="accent1"/>
-          </a:lnRef>
-          <a:fillRef idx="3">
-            <a:schemeClr val="accent1"/>
-          </a:fillRef>
-          <a:effectRef idx="2">
-            <a:schemeClr val="accent1"/>
-          </a:effectRef>
-          <a:fontRef idx="minor">
-            <a:schemeClr val="lt1"/>
-          </a:fontRef>
-        </p:style>
-        <p:txBody>
-          <a:bodyPr rtlCol="0" anchor="ctr"/>
-          <a:lstStyle/>
-          <a:p>
-            <a:pPr algn="ctr"/>
-          </a:p>
-        </p:txBody>
-      </p:sp>
-      <p:sp>
-        <p:nvSpPr>
-          <p:cNvPr id="204" name="TextBox 203"/>
-          <p:cNvSpPr txBox="1"/>
-          <p:nvPr/>
-        </p:nvSpPr>
-        <p:spPr>
-          <a:xfrm>
-            <a:off x="10835640" y="1490472"/>
-            <a:ext cx="914400" cy="182880"/>
-          </a:xfrm>
-          <a:prstGeom prst="rect">
-            <a:avLst/>
-          </a:prstGeom>
-          <a:noFill/>
-          <a:effectLst/>
-        </p:spPr>
-        <p:txBody>
-          <a:bodyPr wrap="square" lIns="0" rIns="0" tIns="0" bIns="0" anchor="ctr">
-            <a:spAutoFit/>
-          </a:bodyPr>
-          <a:lstStyle/>
-          <a:p>
-            <a:pPr algn="l"/>
-            <a:r>
-              <a:rPr sz="900" b="0" i="0">
-                <a:solidFill>
-                  <a:srgbClr val="222222"/>
-                </a:solidFill>
-                <a:latin typeface="Arial"/>
-              </a:rPr>
-              <a:t>good</a:t>
-            </a:r>
-          </a:p>
-        </p:txBody>
-      </p:sp>
-      <p:sp>
-        <p:nvSpPr>
-          <p:cNvPr id="205" name="Rectangle 204"/>
-          <p:cNvSpPr/>
-          <p:nvPr/>
-        </p:nvSpPr>
-        <p:spPr>
-          <a:xfrm>
-            <a:off x="10607040" y="1691640"/>
-            <a:ext cx="182880" cy="109728"/>
-          </a:xfrm>
-          <a:prstGeom prst="rect">
-            <a:avLst/>
-          </a:prstGeom>
-          <a:solidFill>
-            <a:srgbClr val="C53E1F"/>
-          </a:solidFill>
-          <a:ln>
-            <a:noFill/>
-          </a:ln>
-          <a:effectLst/>
-        </p:spPr>
-        <p:style>
-          <a:lnRef idx="1">
-            <a:schemeClr val="accent1"/>
-          </a:lnRef>
-          <a:fillRef idx="3">
-            <a:schemeClr val="accent1"/>
-          </a:fillRef>
-          <a:effectRef idx="2">
-            <a:schemeClr val="accent1"/>
-          </a:effectRef>
-          <a:fontRef idx="minor">
-            <a:schemeClr val="lt1"/>
-          </a:fontRef>
-        </p:style>
-        <p:txBody>
-          <a:bodyPr rtlCol="0" anchor="ctr"/>
-          <a:lstStyle/>
-          <a:p>
-            <a:pPr algn="ctr"/>
-          </a:p>
-        </p:txBody>
-      </p:sp>
-      <p:sp>
-        <p:nvSpPr>
-          <p:cNvPr id="206" name="TextBox 205"/>
-          <p:cNvSpPr txBox="1"/>
-          <p:nvPr/>
-        </p:nvSpPr>
-        <p:spPr>
-          <a:xfrm>
-            <a:off x="10835640" y="1673352"/>
-            <a:ext cx="914400" cy="182880"/>
-          </a:xfrm>
-          <a:prstGeom prst="rect">
-            <a:avLst/>
-          </a:prstGeom>
-          <a:noFill/>
-          <a:effectLst/>
-        </p:spPr>
-        <p:txBody>
-          <a:bodyPr wrap="square" lIns="0" rIns="0" tIns="0" bIns="0" anchor="ctr">
-            <a:spAutoFit/>
-          </a:bodyPr>
-          <a:lstStyle/>
-          <a:p>
-            <a:pPr algn="l"/>
-            <a:r>
-              <a:rPr sz="900" b="0" i="0">
-                <a:solidFill>
-                  <a:srgbClr val="222222"/>
-                </a:solidFill>
-                <a:latin typeface="Arial"/>
-              </a:rPr>
-              <a:t>bad</a:t>
-            </a:r>
-          </a:p>
-        </p:txBody>
-      </p:sp>
-      <p:sp>
-        <p:nvSpPr>
-          <p:cNvPr id="207" name="TextBox 206"/>
+          <p:cNvPr id="205" name="TextBox 204"/>
           <p:cNvSpPr txBox="1"/>
           <p:nvPr/>
         </p:nvSpPr>
@@ -11871,7 +11784,7 @@
                 </a:solidFill>
                 <a:latin typeface="Arial"/>
               </a:rPr>
-              <a:t>HRD proxy (LST+LOH+TAI) per pre-CRT tumor; bars left-to-right = subjects sorted by response then HRD_sum (ascending). Data source: 04_wes_cnv_clonal/hrd_proxy/hrd_proxy_scores.tsv.</a:t>
+              <a:t>HRD-sum mean: good = 17.7, bad = 18.2 (both &lt;&lt; Myriad clinical HRD-42 threshold, reflecting the MSS / TMB-low phenotype)</a:t>
             </a:r>
           </a:p>
         </p:txBody>
@@ -11961,7 +11874,7 @@
                 </a:solidFill>
                 <a:latin typeface="Arial"/>
               </a:rPr>
-              <a:t>HRD-LST (Large-Scale Transition count) by response, pre-CRT tumors</a:t>
+              <a:t>HRD-LST (Large-Scale Transitions) by response — pre-CRT</a:t>
             </a:r>
           </a:p>
         </p:txBody>
@@ -11974,8 +11887,8 @@
         </p:nvCxnSpPr>
         <p:spPr>
           <a:xfrm>
-            <a:off x="3657600" y="5943600"/>
-            <a:ext cx="4572000" cy="0"/>
+            <a:off x="3657600" y="6035040"/>
+            <a:ext cx="4846320" cy="0"/>
           </a:xfrm>
           <a:prstGeom prst="line">
             <a:avLst/>
@@ -12010,8 +11923,8 @@
         </p:nvCxnSpPr>
         <p:spPr>
           <a:xfrm>
-            <a:off x="3657600" y="1371600"/>
-            <a:ext cx="0" cy="4572000"/>
+            <a:off x="3657600" y="1188720"/>
+            <a:ext cx="0" cy="4846320"/>
           </a:xfrm>
           <a:prstGeom prst="line">
             <a:avLst/>
@@ -12046,8 +11959,8 @@
         </p:nvCxnSpPr>
         <p:spPr>
           <a:xfrm>
-            <a:off x="8229600" y="1371600"/>
-            <a:ext cx="0" cy="4572000"/>
+            <a:off x="8503920" y="1188720"/>
+            <a:ext cx="0" cy="4846320"/>
           </a:xfrm>
           <a:prstGeom prst="line">
             <a:avLst/>
@@ -12082,8 +11995,8 @@
         </p:nvCxnSpPr>
         <p:spPr>
           <a:xfrm>
-            <a:off x="3657600" y="1371600"/>
-            <a:ext cx="4572000" cy="0"/>
+            <a:off x="3657600" y="1188720"/>
+            <a:ext cx="4846320" cy="0"/>
           </a:xfrm>
           <a:prstGeom prst="line">
             <a:avLst/>
@@ -12118,7 +12031,7 @@
         </p:nvCxnSpPr>
         <p:spPr>
           <a:xfrm>
-            <a:off x="3593592" y="5943600"/>
+            <a:off x="3593592" y="6035040"/>
             <a:ext cx="64008" cy="0"/>
           </a:xfrm>
           <a:prstGeom prst="line">
@@ -12154,7 +12067,7 @@
         </p:nvSpPr>
         <p:spPr>
           <a:xfrm>
-            <a:off x="3154680" y="5861304"/>
+            <a:off x="3154680" y="5952744"/>
             <a:ext cx="438912" cy="164592"/>
           </a:xfrm>
           <a:prstGeom prst="rect">
@@ -12190,7 +12103,7 @@
         </p:nvCxnSpPr>
         <p:spPr>
           <a:xfrm>
-            <a:off x="3593592" y="5029200"/>
+            <a:off x="3593592" y="5065776"/>
             <a:ext cx="64008" cy="0"/>
           </a:xfrm>
           <a:prstGeom prst="line">
@@ -12226,7 +12139,7 @@
         </p:nvSpPr>
         <p:spPr>
           <a:xfrm>
-            <a:off x="3154680" y="4946904"/>
+            <a:off x="3154680" y="4983480"/>
             <a:ext cx="438912" cy="164592"/>
           </a:xfrm>
           <a:prstGeom prst="rect">
@@ -12262,7 +12175,7 @@
         </p:nvCxnSpPr>
         <p:spPr>
           <a:xfrm>
-            <a:off x="3593592" y="4114800"/>
+            <a:off x="3593592" y="4096512"/>
             <a:ext cx="64008" cy="0"/>
           </a:xfrm>
           <a:prstGeom prst="line">
@@ -12298,7 +12211,7 @@
         </p:nvSpPr>
         <p:spPr>
           <a:xfrm>
-            <a:off x="3154680" y="4032504"/>
+            <a:off x="3154680" y="4014216"/>
             <a:ext cx="438912" cy="164592"/>
           </a:xfrm>
           <a:prstGeom prst="rect">
@@ -12334,7 +12247,7 @@
         </p:nvCxnSpPr>
         <p:spPr>
           <a:xfrm>
-            <a:off x="3593592" y="3200400"/>
+            <a:off x="3593592" y="3127248"/>
             <a:ext cx="64008" cy="0"/>
           </a:xfrm>
           <a:prstGeom prst="line">
@@ -12370,7 +12283,7 @@
         </p:nvSpPr>
         <p:spPr>
           <a:xfrm>
-            <a:off x="3154680" y="3118104"/>
+            <a:off x="3154680" y="3044952"/>
             <a:ext cx="438912" cy="164592"/>
           </a:xfrm>
           <a:prstGeom prst="rect">
@@ -12406,7 +12319,7 @@
         </p:nvCxnSpPr>
         <p:spPr>
           <a:xfrm>
-            <a:off x="3593592" y="2286000"/>
+            <a:off x="3593592" y="2157984"/>
             <a:ext cx="64008" cy="0"/>
           </a:xfrm>
           <a:prstGeom prst="line">
@@ -12442,7 +12355,7 @@
         </p:nvSpPr>
         <p:spPr>
           <a:xfrm>
-            <a:off x="3154680" y="2203704"/>
+            <a:off x="3154680" y="2075688"/>
             <a:ext cx="438912" cy="164592"/>
           </a:xfrm>
           <a:prstGeom prst="rect">
@@ -12465,7 +12378,7 @@
                 </a:solidFill>
                 <a:latin typeface="Arial"/>
               </a:rPr>
-              <a:t>8</a:t>
+              <a:t>7</a:t>
             </a:r>
           </a:p>
         </p:txBody>
@@ -12478,7 +12391,7 @@
         </p:nvCxnSpPr>
         <p:spPr>
           <a:xfrm>
-            <a:off x="3593592" y="1371600"/>
+            <a:off x="3593592" y="1188720"/>
             <a:ext cx="64008" cy="0"/>
           </a:xfrm>
           <a:prstGeom prst="line">
@@ -12514,7 +12427,7 @@
         </p:nvSpPr>
         <p:spPr>
           <a:xfrm>
-            <a:off x="3154680" y="1289304"/>
+            <a:off x="3154680" y="1106424"/>
             <a:ext cx="438912" cy="164592"/>
           </a:xfrm>
           <a:prstGeom prst="rect">
@@ -12537,7 +12450,7 @@
                 </a:solidFill>
                 <a:latin typeface="Arial"/>
               </a:rPr>
-              <a:t>10</a:t>
+              <a:t>9</a:t>
             </a:r>
           </a:p>
         </p:txBody>
@@ -12550,7 +12463,7 @@
         </p:nvSpPr>
         <p:spPr>
           <a:xfrm>
-            <a:off x="2788920" y="2651760"/>
+            <a:off x="2788920" y="2606040"/>
             <a:ext cx="365760" cy="2011680"/>
           </a:xfrm>
           <a:prstGeom prst="rect">
@@ -12586,8 +12499,8 @@
         </p:nvCxnSpPr>
         <p:spPr>
           <a:xfrm flipV="1">
-            <a:off x="4800600" y="2133600"/>
-            <a:ext cx="0" cy="3333750"/>
+            <a:off x="4869180" y="1820849"/>
+            <a:ext cx="0" cy="3687417"/>
           </a:xfrm>
           <a:prstGeom prst="line">
             <a:avLst/>
@@ -12622,8 +12535,8 @@
         </p:nvCxnSpPr>
         <p:spPr>
           <a:xfrm>
-            <a:off x="4594860" y="5467350"/>
-            <a:ext cx="411480" cy="0"/>
+            <a:off x="4640580" y="5508266"/>
+            <a:ext cx="457200" cy="0"/>
           </a:xfrm>
           <a:prstGeom prst="line">
             <a:avLst/>
@@ -12658,8 +12571,8 @@
         </p:nvCxnSpPr>
         <p:spPr>
           <a:xfrm>
-            <a:off x="4594860" y="2133600"/>
-            <a:ext cx="411480" cy="0"/>
+            <a:off x="4640580" y="1820849"/>
+            <a:ext cx="457200" cy="0"/>
           </a:xfrm>
           <a:prstGeom prst="line">
             <a:avLst/>
@@ -12694,8 +12607,8 @@
         </p:nvSpPr>
         <p:spPr>
           <a:xfrm>
-            <a:off x="4389120" y="4514850"/>
-            <a:ext cx="822960" cy="1"/>
+            <a:off x="4411980" y="4454718"/>
+            <a:ext cx="914400" cy="1"/>
           </a:xfrm>
           <a:prstGeom prst="rect">
             <a:avLst/>
@@ -12738,8 +12651,8 @@
         </p:nvCxnSpPr>
         <p:spPr>
           <a:xfrm>
-            <a:off x="4389120" y="4276725"/>
-            <a:ext cx="822960" cy="0"/>
+            <a:off x="4411980" y="4191331"/>
+            <a:ext cx="914400" cy="0"/>
           </a:xfrm>
           <a:prstGeom prst="line">
             <a:avLst/>
@@ -12774,8 +12687,8 @@
         </p:nvSpPr>
         <p:spPr>
           <a:xfrm>
-            <a:off x="4936010" y="2101596"/>
-            <a:ext cx="64008" cy="64008"/>
+            <a:off x="4812299" y="1765985"/>
+            <a:ext cx="109728" cy="109728"/>
           </a:xfrm>
           <a:prstGeom prst="ellipse">
             <a:avLst/>
@@ -12818,8 +12731,8 @@
         </p:nvSpPr>
         <p:spPr>
           <a:xfrm>
-            <a:off x="4914733" y="2577846"/>
-            <a:ext cx="64008" cy="64008"/>
+            <a:off x="4821859" y="2292759"/>
+            <a:ext cx="109728" cy="109728"/>
           </a:xfrm>
           <a:prstGeom prst="ellipse">
             <a:avLst/>
@@ -12862,8 +12775,8 @@
         </p:nvSpPr>
         <p:spPr>
           <a:xfrm>
-            <a:off x="4792663" y="3530346"/>
-            <a:ext cx="64008" cy="64008"/>
+            <a:off x="5032026" y="3346306"/>
+            <a:ext cx="109728" cy="109728"/>
           </a:xfrm>
           <a:prstGeom prst="ellipse">
             <a:avLst/>
@@ -12906,8 +12819,8 @@
         </p:nvSpPr>
         <p:spPr>
           <a:xfrm>
-            <a:off x="4758072" y="3530346"/>
-            <a:ext cx="64008" cy="64008"/>
+            <a:off x="4832212" y="3346306"/>
+            <a:ext cx="109728" cy="109728"/>
           </a:xfrm>
           <a:prstGeom prst="ellipse">
             <a:avLst/>
@@ -12950,8 +12863,8 @@
         </p:nvSpPr>
         <p:spPr>
           <a:xfrm>
-            <a:off x="4973530" y="3530346"/>
-            <a:ext cx="64008" cy="64008"/>
+            <a:off x="4857210" y="3346306"/>
+            <a:ext cx="109728" cy="109728"/>
           </a:xfrm>
           <a:prstGeom prst="ellipse">
             <a:avLst/>
@@ -12994,8 +12907,8 @@
         </p:nvSpPr>
         <p:spPr>
           <a:xfrm>
-            <a:off x="4709544" y="3530346"/>
-            <a:ext cx="64008" cy="64008"/>
+            <a:off x="4744259" y="3346306"/>
+            <a:ext cx="109728" cy="109728"/>
           </a:xfrm>
           <a:prstGeom prst="ellipse">
             <a:avLst/>
@@ -13038,8 +12951,8 @@
         </p:nvSpPr>
         <p:spPr>
           <a:xfrm>
-            <a:off x="4963433" y="4006596"/>
-            <a:ext cx="64008" cy="64008"/>
+            <a:off x="5008004" y="3873080"/>
+            <a:ext cx="109728" cy="109728"/>
           </a:xfrm>
           <a:prstGeom prst="ellipse">
             <a:avLst/>
@@ -13082,8 +12995,8 @@
         </p:nvSpPr>
         <p:spPr>
           <a:xfrm>
-            <a:off x="4701516" y="4006596"/>
-            <a:ext cx="64008" cy="64008"/>
+            <a:off x="4806612" y="3873080"/>
+            <a:ext cx="109728" cy="109728"/>
           </a:xfrm>
           <a:prstGeom prst="ellipse">
             <a:avLst/>
@@ -13126,8 +13039,8 @@
         </p:nvSpPr>
         <p:spPr>
           <a:xfrm>
-            <a:off x="4644050" y="4006596"/>
-            <a:ext cx="64008" cy="64008"/>
+            <a:off x="4732832" y="3873080"/>
+            <a:ext cx="109728" cy="109728"/>
           </a:xfrm>
           <a:prstGeom prst="ellipse">
             <a:avLst/>
@@ -13170,8 +13083,8 @@
         </p:nvSpPr>
         <p:spPr>
           <a:xfrm>
-            <a:off x="4903795" y="4482846"/>
-            <a:ext cx="64008" cy="64008"/>
+            <a:off x="4668744" y="4399854"/>
+            <a:ext cx="109728" cy="109728"/>
           </a:xfrm>
           <a:prstGeom prst="ellipse">
             <a:avLst/>
@@ -13214,8 +13127,8 @@
         </p:nvSpPr>
         <p:spPr>
           <a:xfrm>
-            <a:off x="4952798" y="4482846"/>
-            <a:ext cx="64008" cy="64008"/>
+            <a:off x="4685706" y="4399854"/>
+            <a:ext cx="109728" cy="109728"/>
           </a:xfrm>
           <a:prstGeom prst="ellipse">
             <a:avLst/>
@@ -13258,8 +13171,8 @@
         </p:nvSpPr>
         <p:spPr>
           <a:xfrm>
-            <a:off x="4570503" y="4482846"/>
-            <a:ext cx="64008" cy="64008"/>
+            <a:off x="4966642" y="4399854"/>
+            <a:ext cx="109728" cy="109728"/>
           </a:xfrm>
           <a:prstGeom prst="ellipse">
             <a:avLst/>
@@ -13302,8 +13215,8 @@
         </p:nvSpPr>
         <p:spPr>
           <a:xfrm>
-            <a:off x="4936797" y="4482846"/>
-            <a:ext cx="64008" cy="64008"/>
+            <a:off x="4658945" y="4399854"/>
+            <a:ext cx="109728" cy="109728"/>
           </a:xfrm>
           <a:prstGeom prst="ellipse">
             <a:avLst/>
@@ -13346,8 +13259,8 @@
         </p:nvSpPr>
         <p:spPr>
           <a:xfrm>
-            <a:off x="4574627" y="4482846"/>
-            <a:ext cx="64008" cy="64008"/>
+            <a:off x="4611753" y="4399854"/>
+            <a:ext cx="109728" cy="109728"/>
           </a:xfrm>
           <a:prstGeom prst="ellipse">
             <a:avLst/>
@@ -13390,8 +13303,8 @@
         </p:nvSpPr>
         <p:spPr>
           <a:xfrm>
-            <a:off x="4766096" y="4482846"/>
-            <a:ext cx="64008" cy="64008"/>
+            <a:off x="4825710" y="4399854"/>
+            <a:ext cx="109728" cy="109728"/>
           </a:xfrm>
           <a:prstGeom prst="ellipse">
             <a:avLst/>
@@ -13434,8 +13347,8 @@
         </p:nvSpPr>
         <p:spPr>
           <a:xfrm>
-            <a:off x="4829223" y="4959096"/>
-            <a:ext cx="64008" cy="64008"/>
+            <a:off x="4984732" y="4926628"/>
+            <a:ext cx="109728" cy="109728"/>
           </a:xfrm>
           <a:prstGeom prst="ellipse">
             <a:avLst/>
@@ -13478,8 +13391,8 @@
         </p:nvSpPr>
         <p:spPr>
           <a:xfrm>
-            <a:off x="4573482" y="4959096"/>
-            <a:ext cx="64008" cy="64008"/>
+            <a:off x="4716570" y="4926628"/>
+            <a:ext cx="109728" cy="109728"/>
           </a:xfrm>
           <a:prstGeom prst="ellipse">
             <a:avLst/>
@@ -13522,8 +13435,8 @@
         </p:nvSpPr>
         <p:spPr>
           <a:xfrm>
-            <a:off x="4674555" y="5435346"/>
-            <a:ext cx="64008" cy="64008"/>
+            <a:off x="5027850" y="5453402"/>
+            <a:ext cx="109728" cy="109728"/>
           </a:xfrm>
           <a:prstGeom prst="ellipse">
             <a:avLst/>
@@ -13566,8 +13479,8 @@
         </p:nvSpPr>
         <p:spPr>
           <a:xfrm>
-            <a:off x="3886200" y="6035040"/>
-            <a:ext cx="1828800" cy="228600"/>
+            <a:off x="3771900" y="6126480"/>
+            <a:ext cx="2194560" cy="228600"/>
           </a:xfrm>
           <a:prstGeom prst="rect">
             <a:avLst/>
@@ -13589,7 +13502,7 @@
                 </a:solidFill>
                 <a:latin typeface="Arial"/>
               </a:rPr>
-              <a:t>good (n=18)  median=3.5</a:t>
+              <a:t>good (n=18)  med=3.50</a:t>
             </a:r>
           </a:p>
         </p:txBody>
@@ -13602,8 +13515,8 @@
         </p:nvCxnSpPr>
         <p:spPr>
           <a:xfrm flipV="1">
-            <a:off x="7086600" y="2609850"/>
-            <a:ext cx="0" cy="2381250"/>
+            <a:off x="7292340" y="2347623"/>
+            <a:ext cx="0" cy="2633869"/>
           </a:xfrm>
           <a:prstGeom prst="line">
             <a:avLst/>
@@ -13638,8 +13551,8 @@
         </p:nvCxnSpPr>
         <p:spPr>
           <a:xfrm>
-            <a:off x="6880860" y="4991100"/>
-            <a:ext cx="411480" cy="0"/>
+            <a:off x="7063740" y="4981492"/>
+            <a:ext cx="457200" cy="0"/>
           </a:xfrm>
           <a:prstGeom prst="line">
             <a:avLst/>
@@ -13674,8 +13587,8 @@
         </p:nvCxnSpPr>
         <p:spPr>
           <a:xfrm>
-            <a:off x="6880860" y="2609850"/>
-            <a:ext cx="411480" cy="0"/>
+            <a:off x="7063740" y="2347623"/>
+            <a:ext cx="457200" cy="0"/>
           </a:xfrm>
           <a:prstGeom prst="line">
             <a:avLst/>
@@ -13710,8 +13623,8 @@
         </p:nvSpPr>
         <p:spPr>
           <a:xfrm>
-            <a:off x="6675120" y="4038600"/>
-            <a:ext cx="822960" cy="1"/>
+            <a:off x="6835140" y="3927944"/>
+            <a:ext cx="914400" cy="1"/>
           </a:xfrm>
           <a:prstGeom prst="rect">
             <a:avLst/>
@@ -13754,8 +13667,8 @@
         </p:nvCxnSpPr>
         <p:spPr>
           <a:xfrm>
-            <a:off x="6675120" y="3562350"/>
-            <a:ext cx="822960" cy="0"/>
+            <a:off x="6835140" y="3401170"/>
+            <a:ext cx="914400" cy="0"/>
           </a:xfrm>
           <a:prstGeom prst="line">
             <a:avLst/>
@@ -13790,8 +13703,8 @@
         </p:nvSpPr>
         <p:spPr>
           <a:xfrm>
-            <a:off x="7030191" y="2577846"/>
-            <a:ext cx="64008" cy="64008"/>
+            <a:off x="7360789" y="2292759"/>
+            <a:ext cx="109728" cy="109728"/>
           </a:xfrm>
           <a:prstGeom prst="ellipse">
             <a:avLst/>
@@ -13834,8 +13747,8 @@
         </p:nvSpPr>
         <p:spPr>
           <a:xfrm>
-            <a:off x="7115722" y="3054096"/>
-            <a:ext cx="64008" cy="64008"/>
+            <a:off x="7246259" y="2819533"/>
+            <a:ext cx="109728" cy="109728"/>
           </a:xfrm>
           <a:prstGeom prst="ellipse">
             <a:avLst/>
@@ -13878,8 +13791,8 @@
         </p:nvSpPr>
         <p:spPr>
           <a:xfrm>
-            <a:off x="6987300" y="3054096"/>
-            <a:ext cx="64008" cy="64008"/>
+            <a:off x="7224596" y="2819533"/>
+            <a:ext cx="109728" cy="109728"/>
           </a:xfrm>
           <a:prstGeom prst="ellipse">
             <a:avLst/>
@@ -13922,8 +13835,8 @@
         </p:nvSpPr>
         <p:spPr>
           <a:xfrm>
-            <a:off x="6979099" y="3054096"/>
-            <a:ext cx="64008" cy="64008"/>
+            <a:off x="7030364" y="2819533"/>
+            <a:ext cx="109728" cy="109728"/>
           </a:xfrm>
           <a:prstGeom prst="ellipse">
             <a:avLst/>
@@ -13966,8 +13879,8 @@
         </p:nvSpPr>
         <p:spPr>
           <a:xfrm>
-            <a:off x="6995306" y="3054096"/>
-            <a:ext cx="64008" cy="64008"/>
+            <a:off x="7064436" y="2819533"/>
+            <a:ext cx="109728" cy="109728"/>
           </a:xfrm>
           <a:prstGeom prst="ellipse">
             <a:avLst/>
@@ -14010,8 +13923,8 @@
         </p:nvSpPr>
         <p:spPr>
           <a:xfrm>
-            <a:off x="7015703" y="3530346"/>
-            <a:ext cx="64008" cy="64008"/>
+            <a:off x="7225767" y="3346306"/>
+            <a:ext cx="109728" cy="109728"/>
           </a:xfrm>
           <a:prstGeom prst="ellipse">
             <a:avLst/>
@@ -14054,8 +13967,8 @@
         </p:nvSpPr>
         <p:spPr>
           <a:xfrm>
-            <a:off x="6978222" y="3530346"/>
-            <a:ext cx="64008" cy="64008"/>
+            <a:off x="7090588" y="3346306"/>
+            <a:ext cx="109728" cy="109728"/>
           </a:xfrm>
           <a:prstGeom prst="ellipse">
             <a:avLst/>
@@ -14098,8 +14011,8 @@
         </p:nvSpPr>
         <p:spPr>
           <a:xfrm>
-            <a:off x="6850575" y="3530346"/>
-            <a:ext cx="64008" cy="64008"/>
+            <a:off x="7396057" y="3346306"/>
+            <a:ext cx="109728" cy="109728"/>
           </a:xfrm>
           <a:prstGeom prst="ellipse">
             <a:avLst/>
@@ -14142,8 +14055,8 @@
         </p:nvSpPr>
         <p:spPr>
           <a:xfrm>
-            <a:off x="7171127" y="3530346"/>
-            <a:ext cx="64008" cy="64008"/>
+            <a:off x="7238552" y="3346306"/>
+            <a:ext cx="109728" cy="109728"/>
           </a:xfrm>
           <a:prstGeom prst="ellipse">
             <a:avLst/>
@@ -14186,8 +14099,8 @@
         </p:nvSpPr>
         <p:spPr>
           <a:xfrm>
-            <a:off x="6902437" y="4006596"/>
-            <a:ext cx="64008" cy="64008"/>
+            <a:off x="7129036" y="3873080"/>
+            <a:ext cx="109728" cy="109728"/>
           </a:xfrm>
           <a:prstGeom prst="ellipse">
             <a:avLst/>
@@ -14230,8 +14143,8 @@
         </p:nvSpPr>
         <p:spPr>
           <a:xfrm>
-            <a:off x="7021642" y="4006596"/>
-            <a:ext cx="64008" cy="64008"/>
+            <a:off x="7248699" y="3873080"/>
+            <a:ext cx="109728" cy="109728"/>
           </a:xfrm>
           <a:prstGeom prst="ellipse">
             <a:avLst/>
@@ -14274,8 +14187,8 @@
         </p:nvSpPr>
         <p:spPr>
           <a:xfrm>
-            <a:off x="6891577" y="4006596"/>
-            <a:ext cx="64008" cy="64008"/>
+            <a:off x="7321224" y="3873080"/>
+            <a:ext cx="109728" cy="109728"/>
           </a:xfrm>
           <a:prstGeom prst="ellipse">
             <a:avLst/>
@@ -14318,8 +14231,8 @@
         </p:nvSpPr>
         <p:spPr>
           <a:xfrm>
-            <a:off x="7251186" y="4006596"/>
-            <a:ext cx="64008" cy="64008"/>
+            <a:off x="7228096" y="3873080"/>
+            <a:ext cx="109728" cy="109728"/>
           </a:xfrm>
           <a:prstGeom prst="ellipse">
             <a:avLst/>
@@ -14362,8 +14275,8 @@
         </p:nvSpPr>
         <p:spPr>
           <a:xfrm>
-            <a:off x="7245310" y="4482846"/>
-            <a:ext cx="64008" cy="64008"/>
+            <a:off x="7365728" y="4399854"/>
+            <a:ext cx="109728" cy="109728"/>
           </a:xfrm>
           <a:prstGeom prst="ellipse">
             <a:avLst/>
@@ -14406,8 +14319,8 @@
         </p:nvSpPr>
         <p:spPr>
           <a:xfrm>
-            <a:off x="6965460" y="4482846"/>
-            <a:ext cx="64008" cy="64008"/>
+            <a:off x="7433135" y="4399854"/>
+            <a:ext cx="109728" cy="109728"/>
           </a:xfrm>
           <a:prstGeom prst="ellipse">
             <a:avLst/>
@@ -14450,8 +14363,8 @@
         </p:nvSpPr>
         <p:spPr>
           <a:xfrm>
-            <a:off x="6977284" y="4482846"/>
-            <a:ext cx="64008" cy="64008"/>
+            <a:off x="7072744" y="4399854"/>
+            <a:ext cx="109728" cy="109728"/>
           </a:xfrm>
           <a:prstGeom prst="ellipse">
             <a:avLst/>
@@ -14494,8 +14407,8 @@
         </p:nvSpPr>
         <p:spPr>
           <a:xfrm>
-            <a:off x="7138224" y="4959096"/>
-            <a:ext cx="64008" cy="64008"/>
+            <a:off x="7111652" y="4926628"/>
+            <a:ext cx="109728" cy="109728"/>
           </a:xfrm>
           <a:prstGeom prst="ellipse">
             <a:avLst/>
@@ -14538,8 +14451,8 @@
         </p:nvSpPr>
         <p:spPr>
           <a:xfrm>
-            <a:off x="6172200" y="6035040"/>
-            <a:ext cx="1828800" cy="228600"/>
+            <a:off x="6195060" y="6126480"/>
+            <a:ext cx="2194560" cy="228600"/>
           </a:xfrm>
           <a:prstGeom prst="rect">
             <a:avLst/>
@@ -14561,21 +14474,67 @@
                 </a:solidFill>
                 <a:latin typeface="Arial"/>
               </a:rPr>
-              <a:t>bad (n=17)  median=5.0</a:t>
+              <a:t>bad (n=17)  med=5.00</a:t>
             </a:r>
           </a:p>
         </p:txBody>
       </p:sp>
       <p:sp>
         <p:nvSpPr>
-          <p:cNvPr id="68" name="TextBox 67"/>
+          <p:cNvPr id="68" name="Rectangle 67"/>
+          <p:cNvSpPr/>
+          <p:nvPr/>
+        </p:nvSpPr>
+        <p:spPr>
+          <a:xfrm>
+            <a:off x="4937760" y="868680"/>
+            <a:ext cx="2286000" cy="274320"/>
+          </a:xfrm>
+          <a:prstGeom prst="rect">
+            <a:avLst/>
+          </a:prstGeom>
+          <a:solidFill>
+            <a:srgbClr val="F0F0F0"/>
+          </a:solidFill>
+          <a:ln w="10160">
+            <a:solidFill>
+              <a:srgbClr val="222222"/>
+            </a:solidFill>
+          </a:ln>
+          <a:effectLst/>
+        </p:spPr>
+        <p:style>
+          <a:lnRef idx="1">
+            <a:schemeClr val="accent1"/>
+          </a:lnRef>
+          <a:fillRef idx="3">
+            <a:schemeClr val="accent1"/>
+          </a:fillRef>
+          <a:effectRef idx="2">
+            <a:schemeClr val="accent1"/>
+          </a:effectRef>
+          <a:fontRef idx="minor">
+            <a:schemeClr val="lt1"/>
+          </a:fontRef>
+        </p:style>
+        <p:txBody>
+          <a:bodyPr rtlCol="0" anchor="ctr"/>
+          <a:lstStyle/>
+          <a:p>
+            <a:pPr algn="ctr"/>
+          </a:p>
+        </p:txBody>
+      </p:sp>
+      <p:sp>
+        <p:nvSpPr>
+          <p:cNvPr id="69" name="TextBox 68"/>
           <p:cNvSpPr txBox="1"/>
           <p:nvPr/>
         </p:nvSpPr>
         <p:spPr>
           <a:xfrm>
-            <a:off x="3657600" y="822960"/>
-            <a:ext cx="4572000" cy="182880"/>
+            <a:off x="4937760" y="868680"/>
+            <a:ext cx="2286000" cy="274320"/>
           </a:xfrm>
           <a:prstGeom prst="rect">
             <a:avLst/>
@@ -14591,7 +14550,7 @@
           <a:p>
             <a:pPr algn="ctr"/>
             <a:r>
-              <a:rPr sz="1000" b="0" i="1">
+              <a:rPr sz="1000" b="1" i="0">
                 <a:solidFill>
                   <a:srgbClr val="222222"/>
                 </a:solidFill>
@@ -14687,7 +14646,7 @@
                 </a:solidFill>
                 <a:latin typeface="Arial"/>
               </a:rPr>
-              <a:t>CIN (fraction of genome with copy-number aberrations) by response</a:t>
+              <a:t>CIN (copy-number aberrations) by response</a:t>
             </a:r>
           </a:p>
         </p:txBody>
@@ -14700,8 +14659,8 @@
         </p:nvCxnSpPr>
         <p:spPr>
           <a:xfrm>
-            <a:off x="3657600" y="5943600"/>
-            <a:ext cx="4572000" cy="0"/>
+            <a:off x="3657600" y="6035040"/>
+            <a:ext cx="4846320" cy="0"/>
           </a:xfrm>
           <a:prstGeom prst="line">
             <a:avLst/>
@@ -14736,8 +14695,8 @@
         </p:nvCxnSpPr>
         <p:spPr>
           <a:xfrm>
-            <a:off x="3657600" y="1371600"/>
-            <a:ext cx="0" cy="4572000"/>
+            <a:off x="3657600" y="1188720"/>
+            <a:ext cx="0" cy="4846320"/>
           </a:xfrm>
           <a:prstGeom prst="line">
             <a:avLst/>
@@ -14772,8 +14731,8 @@
         </p:nvCxnSpPr>
         <p:spPr>
           <a:xfrm>
-            <a:off x="8229600" y="1371600"/>
-            <a:ext cx="0" cy="4572000"/>
+            <a:off x="8503920" y="1188720"/>
+            <a:ext cx="0" cy="4846320"/>
           </a:xfrm>
           <a:prstGeom prst="line">
             <a:avLst/>
@@ -14808,8 +14767,8 @@
         </p:nvCxnSpPr>
         <p:spPr>
           <a:xfrm>
-            <a:off x="3657600" y="1371600"/>
-            <a:ext cx="4572000" cy="0"/>
+            <a:off x="3657600" y="1188720"/>
+            <a:ext cx="4846320" cy="0"/>
           </a:xfrm>
           <a:prstGeom prst="line">
             <a:avLst/>
@@ -14844,7 +14803,7 @@
         </p:nvCxnSpPr>
         <p:spPr>
           <a:xfrm>
-            <a:off x="3593592" y="5943600"/>
+            <a:off x="3593592" y="6035040"/>
             <a:ext cx="64008" cy="0"/>
           </a:xfrm>
           <a:prstGeom prst="line">
@@ -14880,7 +14839,7 @@
         </p:nvSpPr>
         <p:spPr>
           <a:xfrm>
-            <a:off x="3154680" y="5861304"/>
+            <a:off x="3154680" y="5952744"/>
             <a:ext cx="438912" cy="164592"/>
           </a:xfrm>
           <a:prstGeom prst="rect">
@@ -14916,7 +14875,7 @@
         </p:nvCxnSpPr>
         <p:spPr>
           <a:xfrm>
-            <a:off x="3593592" y="5029200"/>
+            <a:off x="3593592" y="5065776"/>
             <a:ext cx="64008" cy="0"/>
           </a:xfrm>
           <a:prstGeom prst="line">
@@ -14952,7 +14911,7 @@
         </p:nvSpPr>
         <p:spPr>
           <a:xfrm>
-            <a:off x="3154680" y="4946904"/>
+            <a:off x="3154680" y="4983480"/>
             <a:ext cx="438912" cy="164592"/>
           </a:xfrm>
           <a:prstGeom prst="rect">
@@ -14975,7 +14934,7 @@
                 </a:solidFill>
                 <a:latin typeface="Arial"/>
               </a:rPr>
-              <a:t>0.11</a:t>
+              <a:t>0.12</a:t>
             </a:r>
           </a:p>
         </p:txBody>
@@ -14988,7 +14947,7 @@
         </p:nvCxnSpPr>
         <p:spPr>
           <a:xfrm>
-            <a:off x="3593592" y="4114800"/>
+            <a:off x="3593592" y="4096512"/>
             <a:ext cx="64008" cy="0"/>
           </a:xfrm>
           <a:prstGeom prst="line">
@@ -15024,7 +14983,7 @@
         </p:nvSpPr>
         <p:spPr>
           <a:xfrm>
-            <a:off x="3154680" y="4032504"/>
+            <a:off x="3154680" y="4014216"/>
             <a:ext cx="438912" cy="164592"/>
           </a:xfrm>
           <a:prstGeom prst="rect">
@@ -15047,7 +15006,7 @@
                 </a:solidFill>
                 <a:latin typeface="Arial"/>
               </a:rPr>
-              <a:t>0.23</a:t>
+              <a:t>0.24</a:t>
             </a:r>
           </a:p>
         </p:txBody>
@@ -15060,7 +15019,7 @@
         </p:nvCxnSpPr>
         <p:spPr>
           <a:xfrm>
-            <a:off x="3593592" y="3200400"/>
+            <a:off x="3593592" y="3127248"/>
             <a:ext cx="64008" cy="0"/>
           </a:xfrm>
           <a:prstGeom prst="line">
@@ -15096,7 +15055,7 @@
         </p:nvSpPr>
         <p:spPr>
           <a:xfrm>
-            <a:off x="3154680" y="3118104"/>
+            <a:off x="3154680" y="3044952"/>
             <a:ext cx="438912" cy="164592"/>
           </a:xfrm>
           <a:prstGeom prst="rect">
@@ -15119,7 +15078,7 @@
                 </a:solidFill>
                 <a:latin typeface="Arial"/>
               </a:rPr>
-              <a:t>0.34</a:t>
+              <a:t>0.36</a:t>
             </a:r>
           </a:p>
         </p:txBody>
@@ -15132,7 +15091,7 @@
         </p:nvCxnSpPr>
         <p:spPr>
           <a:xfrm>
-            <a:off x="3593592" y="2286000"/>
+            <a:off x="3593592" y="2157984"/>
             <a:ext cx="64008" cy="0"/>
           </a:xfrm>
           <a:prstGeom prst="line">
@@ -15168,7 +15127,7 @@
         </p:nvSpPr>
         <p:spPr>
           <a:xfrm>
-            <a:off x="3154680" y="2203704"/>
+            <a:off x="3154680" y="2075688"/>
             <a:ext cx="438912" cy="164592"/>
           </a:xfrm>
           <a:prstGeom prst="rect">
@@ -15191,7 +15150,7 @@
                 </a:solidFill>
                 <a:latin typeface="Arial"/>
               </a:rPr>
-              <a:t>0.46</a:t>
+              <a:t>0.48</a:t>
             </a:r>
           </a:p>
         </p:txBody>
@@ -15204,7 +15163,7 @@
         </p:nvCxnSpPr>
         <p:spPr>
           <a:xfrm>
-            <a:off x="3593592" y="1371600"/>
+            <a:off x="3593592" y="1188720"/>
             <a:ext cx="64008" cy="0"/>
           </a:xfrm>
           <a:prstGeom prst="line">
@@ -15240,7 +15199,7 @@
         </p:nvSpPr>
         <p:spPr>
           <a:xfrm>
-            <a:off x="3154680" y="1289304"/>
+            <a:off x="3154680" y="1106424"/>
             <a:ext cx="438912" cy="164592"/>
           </a:xfrm>
           <a:prstGeom prst="rect">
@@ -15263,7 +15222,7 @@
                 </a:solidFill>
                 <a:latin typeface="Arial"/>
               </a:rPr>
-              <a:t>0.57</a:t>
+              <a:t>0.60</a:t>
             </a:r>
           </a:p>
         </p:txBody>
@@ -15276,7 +15235,7 @@
         </p:nvSpPr>
         <p:spPr>
           <a:xfrm>
-            <a:off x="2788920" y="2651760"/>
+            <a:off x="2788920" y="2606040"/>
             <a:ext cx="365760" cy="2011680"/>
           </a:xfrm>
           <a:prstGeom prst="rect">
@@ -15312,8 +15271,8 @@
         </p:nvCxnSpPr>
         <p:spPr>
           <a:xfrm flipV="1">
-            <a:off x="4800600" y="1787236"/>
-            <a:ext cx="0" cy="3543415"/>
+            <a:off x="4869180" y="1820849"/>
+            <a:ext cx="0" cy="3592714"/>
           </a:xfrm>
           <a:prstGeom prst="line">
             <a:avLst/>
@@ -15348,8 +15307,8 @@
         </p:nvCxnSpPr>
         <p:spPr>
           <a:xfrm>
-            <a:off x="4594860" y="5330651"/>
-            <a:ext cx="411480" cy="0"/>
+            <a:off x="4640580" y="5413563"/>
+            <a:ext cx="457200" cy="0"/>
           </a:xfrm>
           <a:prstGeom prst="line">
             <a:avLst/>
@@ -15384,8 +15343,8 @@
         </p:nvCxnSpPr>
         <p:spPr>
           <a:xfrm>
-            <a:off x="4594860" y="1787236"/>
-            <a:ext cx="411480" cy="0"/>
+            <a:off x="4640580" y="1820849"/>
+            <a:ext cx="457200" cy="0"/>
           </a:xfrm>
           <a:prstGeom prst="line">
             <a:avLst/>
@@ -15420,8 +15379,8 @@
         </p:nvSpPr>
         <p:spPr>
           <a:xfrm>
-            <a:off x="4389120" y="5048055"/>
-            <a:ext cx="822960" cy="1"/>
+            <a:off x="4411980" y="5127035"/>
+            <a:ext cx="914400" cy="1"/>
           </a:xfrm>
           <a:prstGeom prst="rect">
             <a:avLst/>
@@ -15464,8 +15423,8 @@
         </p:nvCxnSpPr>
         <p:spPr>
           <a:xfrm>
-            <a:off x="4389120" y="4556091"/>
-            <a:ext cx="822960" cy="0"/>
+            <a:off x="4411980" y="4628226"/>
+            <a:ext cx="914400" cy="0"/>
           </a:xfrm>
           <a:prstGeom prst="line">
             <a:avLst/>
@@ -15500,8 +15459,8 @@
         </p:nvSpPr>
         <p:spPr>
           <a:xfrm>
-            <a:off x="4936010" y="1755232"/>
-            <a:ext cx="64008" cy="64008"/>
+            <a:off x="4812299" y="1765985"/>
+            <a:ext cx="109728" cy="109728"/>
           </a:xfrm>
           <a:prstGeom prst="ellipse">
             <a:avLst/>
@@ -15544,8 +15503,8 @@
         </p:nvSpPr>
         <p:spPr>
           <a:xfrm>
-            <a:off x="4914733" y="1960240"/>
-            <a:ext cx="64008" cy="64008"/>
+            <a:off x="4821859" y="1973844"/>
+            <a:ext cx="109728" cy="109728"/>
           </a:xfrm>
           <a:prstGeom prst="ellipse">
             <a:avLst/>
@@ -15588,8 +15547,8 @@
         </p:nvSpPr>
         <p:spPr>
           <a:xfrm>
-            <a:off x="4792663" y="2248717"/>
-            <a:ext cx="64008" cy="64008"/>
+            <a:off x="5032026" y="2266335"/>
+            <a:ext cx="109728" cy="109728"/>
           </a:xfrm>
           <a:prstGeom prst="ellipse">
             <a:avLst/>
@@ -15632,8 +15591,8 @@
         </p:nvSpPr>
         <p:spPr>
           <a:xfrm>
-            <a:off x="4758072" y="2811152"/>
-            <a:ext cx="64008" cy="64008"/>
+            <a:off x="4832212" y="2836595"/>
+            <a:ext cx="109728" cy="109728"/>
           </a:xfrm>
           <a:prstGeom prst="ellipse">
             <a:avLst/>
@@ -15676,8 +15635,8 @@
         </p:nvSpPr>
         <p:spPr>
           <a:xfrm>
-            <a:off x="4973530" y="2831018"/>
-            <a:ext cx="64008" cy="64008"/>
+            <a:off x="4857210" y="2856738"/>
+            <a:ext cx="109728" cy="109728"/>
           </a:xfrm>
           <a:prstGeom prst="ellipse">
             <a:avLst/>
@@ -15720,8 +15679,8 @@
         </p:nvSpPr>
         <p:spPr>
           <a:xfrm>
-            <a:off x="4709544" y="3421635"/>
-            <a:ext cx="64008" cy="64008"/>
+            <a:off x="4744259" y="3455572"/>
+            <a:ext cx="109728" cy="109728"/>
           </a:xfrm>
           <a:prstGeom prst="ellipse">
             <a:avLst/>
@@ -15764,8 +15723,8 @@
         </p:nvSpPr>
         <p:spPr>
           <a:xfrm>
-            <a:off x="4963433" y="3928298"/>
-            <a:ext cx="64008" cy="64008"/>
+            <a:off x="5008004" y="3969285"/>
+            <a:ext cx="109728" cy="109728"/>
           </a:xfrm>
           <a:prstGeom prst="ellipse">
             <a:avLst/>
@@ -15808,8 +15767,8 @@
         </p:nvSpPr>
         <p:spPr>
           <a:xfrm>
-            <a:off x="4701516" y="4309842"/>
-            <a:ext cx="64008" cy="64008"/>
+            <a:off x="4806612" y="4356136"/>
+            <a:ext cx="109728" cy="109728"/>
           </a:xfrm>
           <a:prstGeom prst="ellipse">
             <a:avLst/>
@@ -15852,8 +15811,8 @@
         </p:nvSpPr>
         <p:spPr>
           <a:xfrm>
-            <a:off x="4644050" y="4381930"/>
-            <a:ext cx="64008" cy="64008"/>
+            <a:off x="4732832" y="4429227"/>
+            <a:ext cx="109728" cy="109728"/>
           </a:xfrm>
           <a:prstGeom prst="ellipse">
             <a:avLst/>
@@ -15896,8 +15855,8 @@
         </p:nvSpPr>
         <p:spPr>
           <a:xfrm>
-            <a:off x="4903795" y="4666244"/>
-            <a:ext cx="64008" cy="64008"/>
+            <a:off x="4668744" y="4717497"/>
+            <a:ext cx="109728" cy="109728"/>
           </a:xfrm>
           <a:prstGeom prst="ellipse">
             <a:avLst/>
@@ -15940,8 +15899,8 @@
         </p:nvSpPr>
         <p:spPr>
           <a:xfrm>
-            <a:off x="4952798" y="4714482"/>
-            <a:ext cx="64008" cy="64008"/>
+            <a:off x="4685706" y="4766407"/>
+            <a:ext cx="109728" cy="109728"/>
           </a:xfrm>
           <a:prstGeom prst="ellipse">
             <a:avLst/>
@@ -15984,8 +15943,8 @@
         </p:nvSpPr>
         <p:spPr>
           <a:xfrm>
-            <a:off x="4570503" y="4853413"/>
-            <a:ext cx="64008" cy="64008"/>
+            <a:off x="4966642" y="4907270"/>
+            <a:ext cx="109728" cy="109728"/>
           </a:xfrm>
           <a:prstGeom prst="ellipse">
             <a:avLst/>
@@ -16028,8 +15987,8 @@
         </p:nvSpPr>
         <p:spPr>
           <a:xfrm>
-            <a:off x="4936797" y="4915216"/>
-            <a:ext cx="64008" cy="64008"/>
+            <a:off x="4658945" y="4969934"/>
+            <a:ext cx="109728" cy="109728"/>
           </a:xfrm>
           <a:prstGeom prst="ellipse">
             <a:avLst/>
@@ -16072,8 +16031,8 @@
         </p:nvSpPr>
         <p:spPr>
           <a:xfrm>
-            <a:off x="4574627" y="5049662"/>
-            <a:ext cx="64008" cy="64008"/>
+            <a:off x="4611753" y="5106250"/>
+            <a:ext cx="109728" cy="109728"/>
           </a:xfrm>
           <a:prstGeom prst="ellipse">
             <a:avLst/>
@@ -16116,8 +16075,8 @@
         </p:nvSpPr>
         <p:spPr>
           <a:xfrm>
-            <a:off x="4766096" y="5051608"/>
-            <a:ext cx="64008" cy="64008"/>
+            <a:off x="4825710" y="5108223"/>
+            <a:ext cx="109728" cy="109728"/>
           </a:xfrm>
           <a:prstGeom prst="ellipse">
             <a:avLst/>
@@ -16160,8 +16119,8 @@
         </p:nvSpPr>
         <p:spPr>
           <a:xfrm>
-            <a:off x="4829223" y="5166437"/>
-            <a:ext cx="64008" cy="64008"/>
+            <a:off x="4984732" y="5224650"/>
+            <a:ext cx="109728" cy="109728"/>
           </a:xfrm>
           <a:prstGeom prst="ellipse">
             <a:avLst/>
@@ -16204,8 +16163,8 @@
         </p:nvSpPr>
         <p:spPr>
           <a:xfrm>
-            <a:off x="4573482" y="5221296"/>
-            <a:ext cx="64008" cy="64008"/>
+            <a:off x="4716570" y="5280272"/>
+            <a:ext cx="109728" cy="109728"/>
           </a:xfrm>
           <a:prstGeom prst="ellipse">
             <a:avLst/>
@@ -16248,8 +16207,8 @@
         </p:nvSpPr>
         <p:spPr>
           <a:xfrm>
-            <a:off x="4674555" y="5298647"/>
-            <a:ext cx="64008" cy="64008"/>
+            <a:off x="5027850" y="5358699"/>
+            <a:ext cx="109728" cy="109728"/>
           </a:xfrm>
           <a:prstGeom prst="ellipse">
             <a:avLst/>
@@ -16292,8 +16251,8 @@
         </p:nvSpPr>
         <p:spPr>
           <a:xfrm>
-            <a:off x="3886200" y="6035040"/>
-            <a:ext cx="1828800" cy="228600"/>
+            <a:off x="3771900" y="6126480"/>
+            <a:ext cx="2194560" cy="228600"/>
           </a:xfrm>
           <a:prstGeom prst="rect">
             <a:avLst/>
@@ -16315,7 +16274,7 @@
                 </a:solidFill>
                 <a:latin typeface="Arial"/>
               </a:rPr>
-              <a:t>good (n=18)  median=0.174</a:t>
+              <a:t>good (n=18)  med=0.17</a:t>
             </a:r>
           </a:p>
         </p:txBody>
@@ -16328,8 +16287,8 @@
         </p:nvCxnSpPr>
         <p:spPr>
           <a:xfrm flipV="1">
-            <a:off x="7086600" y="2434396"/>
-            <a:ext cx="0" cy="2820209"/>
+            <a:off x="7292340" y="2477012"/>
+            <a:ext cx="0" cy="2859447"/>
           </a:xfrm>
           <a:prstGeom prst="line">
             <a:avLst/>
@@ -16364,8 +16323,8 @@
         </p:nvCxnSpPr>
         <p:spPr>
           <a:xfrm>
-            <a:off x="6880860" y="5254605"/>
-            <a:ext cx="411480" cy="0"/>
+            <a:off x="7063740" y="5336459"/>
+            <a:ext cx="457200" cy="0"/>
           </a:xfrm>
           <a:prstGeom prst="line">
             <a:avLst/>
@@ -16400,8 +16359,8 @@
         </p:nvCxnSpPr>
         <p:spPr>
           <a:xfrm>
-            <a:off x="6880860" y="2434396"/>
-            <a:ext cx="411480" cy="0"/>
+            <a:off x="7063740" y="2477012"/>
+            <a:ext cx="457200" cy="0"/>
           </a:xfrm>
           <a:prstGeom prst="line">
             <a:avLst/>
@@ -16436,8 +16395,8 @@
         </p:nvSpPr>
         <p:spPr>
           <a:xfrm>
-            <a:off x="6675120" y="5067385"/>
-            <a:ext cx="822960" cy="1"/>
+            <a:off x="6835140" y="5146634"/>
+            <a:ext cx="914400" cy="1"/>
           </a:xfrm>
           <a:prstGeom prst="rect">
             <a:avLst/>
@@ -16480,8 +16439,8 @@
         </p:nvCxnSpPr>
         <p:spPr>
           <a:xfrm>
-            <a:off x="6675120" y="4669799"/>
-            <a:ext cx="822960" cy="0"/>
+            <a:off x="6835140" y="4743516"/>
+            <a:ext cx="914400" cy="0"/>
           </a:xfrm>
           <a:prstGeom prst="line">
             <a:avLst/>
@@ -16516,8 +16475,8 @@
         </p:nvSpPr>
         <p:spPr>
           <a:xfrm>
-            <a:off x="7030191" y="2402392"/>
-            <a:ext cx="64008" cy="64008"/>
+            <a:off x="7360789" y="2422148"/>
+            <a:ext cx="109728" cy="109728"/>
           </a:xfrm>
           <a:prstGeom prst="ellipse">
             <a:avLst/>
@@ -16560,8 +16519,8 @@
         </p:nvSpPr>
         <p:spPr>
           <a:xfrm>
-            <a:off x="7115722" y="2534800"/>
-            <a:ext cx="64008" cy="64008"/>
+            <a:off x="7246259" y="2556399"/>
+            <a:ext cx="109728" cy="109728"/>
           </a:xfrm>
           <a:prstGeom prst="ellipse">
             <a:avLst/>
@@ -16604,8 +16563,8 @@
         </p:nvSpPr>
         <p:spPr>
           <a:xfrm>
-            <a:off x="6987300" y="2720751"/>
-            <a:ext cx="64008" cy="64008"/>
+            <a:off x="7224596" y="2744937"/>
+            <a:ext cx="109728" cy="109728"/>
           </a:xfrm>
           <a:prstGeom prst="ellipse">
             <a:avLst/>
@@ -16648,8 +16607,8 @@
         </p:nvSpPr>
         <p:spPr>
           <a:xfrm>
-            <a:off x="6979099" y="2805350"/>
-            <a:ext cx="64008" cy="64008"/>
+            <a:off x="7030364" y="2830713"/>
+            <a:ext cx="109728" cy="109728"/>
           </a:xfrm>
           <a:prstGeom prst="ellipse">
             <a:avLst/>
@@ -16692,8 +16651,8 @@
         </p:nvSpPr>
         <p:spPr>
           <a:xfrm>
-            <a:off x="6995306" y="3123522"/>
-            <a:ext cx="64008" cy="64008"/>
+            <a:off x="7064436" y="3153312"/>
+            <a:ext cx="109728" cy="109728"/>
           </a:xfrm>
           <a:prstGeom prst="ellipse">
             <a:avLst/>
@@ -16736,8 +16695,8 @@
         </p:nvSpPr>
         <p:spPr>
           <a:xfrm>
-            <a:off x="7015703" y="4060825"/>
-            <a:ext cx="64008" cy="64008"/>
+            <a:off x="7225767" y="4103655"/>
+            <a:ext cx="109728" cy="109728"/>
           </a:xfrm>
           <a:prstGeom prst="ellipse">
             <a:avLst/>
@@ -16780,8 +16739,8 @@
         </p:nvSpPr>
         <p:spPr>
           <a:xfrm>
-            <a:off x="6978222" y="4092676"/>
-            <a:ext cx="64008" cy="64008"/>
+            <a:off x="7090588" y="4135949"/>
+            <a:ext cx="109728" cy="109728"/>
           </a:xfrm>
           <a:prstGeom prst="ellipse">
             <a:avLst/>
@@ -16824,8 +16783,8 @@
         </p:nvSpPr>
         <p:spPr>
           <a:xfrm>
-            <a:off x="6850575" y="4123762"/>
-            <a:ext cx="64008" cy="64008"/>
+            <a:off x="7396057" y="4167468"/>
+            <a:ext cx="109728" cy="109728"/>
           </a:xfrm>
           <a:prstGeom prst="ellipse">
             <a:avLst/>
@@ -16868,8 +16827,8 @@
         </p:nvSpPr>
         <p:spPr>
           <a:xfrm>
-            <a:off x="7171127" y="4637795"/>
-            <a:ext cx="64008" cy="64008"/>
+            <a:off x="7238552" y="4688652"/>
+            <a:ext cx="109728" cy="109728"/>
           </a:xfrm>
           <a:prstGeom prst="ellipse">
             <a:avLst/>
@@ -16912,8 +16871,8 @@
         </p:nvSpPr>
         <p:spPr>
           <a:xfrm>
-            <a:off x="6902437" y="4774281"/>
-            <a:ext cx="64008" cy="64008"/>
+            <a:off x="7129036" y="4827037"/>
+            <a:ext cx="109728" cy="109728"/>
           </a:xfrm>
           <a:prstGeom prst="ellipse">
             <a:avLst/>
@@ -16956,8 +16915,8 @@
         </p:nvSpPr>
         <p:spPr>
           <a:xfrm>
-            <a:off x="7021642" y="4781751"/>
-            <a:ext cx="64008" cy="64008"/>
+            <a:off x="7248699" y="4834612"/>
+            <a:ext cx="109728" cy="109728"/>
           </a:xfrm>
           <a:prstGeom prst="ellipse">
             <a:avLst/>
@@ -17000,8 +16959,8 @@
         </p:nvSpPr>
         <p:spPr>
           <a:xfrm>
-            <a:off x="6891577" y="5020600"/>
-            <a:ext cx="64008" cy="64008"/>
+            <a:off x="7321224" y="5076783"/>
+            <a:ext cx="109728" cy="109728"/>
           </a:xfrm>
           <a:prstGeom prst="ellipse">
             <a:avLst/>
@@ -17044,8 +17003,8 @@
         </p:nvSpPr>
         <p:spPr>
           <a:xfrm>
-            <a:off x="7251186" y="5035381"/>
-            <a:ext cx="64008" cy="64008"/>
+            <a:off x="7228096" y="5091770"/>
+            <a:ext cx="109728" cy="109728"/>
           </a:xfrm>
           <a:prstGeom prst="ellipse">
             <a:avLst/>
@@ -17088,8 +17047,8 @@
         </p:nvSpPr>
         <p:spPr>
           <a:xfrm>
-            <a:off x="7245310" y="5108521"/>
-            <a:ext cx="64008" cy="64008"/>
+            <a:off x="7365728" y="5165927"/>
+            <a:ext cx="109728" cy="109728"/>
           </a:xfrm>
           <a:prstGeom prst="ellipse">
             <a:avLst/>
@@ -17132,8 +17091,8 @@
         </p:nvSpPr>
         <p:spPr>
           <a:xfrm>
-            <a:off x="6965460" y="5139990"/>
-            <a:ext cx="64008" cy="64008"/>
+            <a:off x="7433135" y="5197834"/>
+            <a:ext cx="109728" cy="109728"/>
           </a:xfrm>
           <a:prstGeom prst="ellipse">
             <a:avLst/>
@@ -17176,8 +17135,8 @@
         </p:nvSpPr>
         <p:spPr>
           <a:xfrm>
-            <a:off x="6977284" y="5154117"/>
-            <a:ext cx="64008" cy="64008"/>
+            <a:off x="7072744" y="5212158"/>
+            <a:ext cx="109728" cy="109728"/>
           </a:xfrm>
           <a:prstGeom prst="ellipse">
             <a:avLst/>
@@ -17220,8 +17179,8 @@
         </p:nvSpPr>
         <p:spPr>
           <a:xfrm>
-            <a:off x="7138224" y="5222601"/>
-            <a:ext cx="64008" cy="64008"/>
+            <a:off x="7111652" y="5281595"/>
+            <a:ext cx="109728" cy="109728"/>
           </a:xfrm>
           <a:prstGeom prst="ellipse">
             <a:avLst/>
@@ -17264,8 +17223,8 @@
         </p:nvSpPr>
         <p:spPr>
           <a:xfrm>
-            <a:off x="6172200" y="6035040"/>
-            <a:ext cx="1828800" cy="228600"/>
+            <a:off x="6195060" y="6126480"/>
+            <a:ext cx="2194560" cy="228600"/>
           </a:xfrm>
           <a:prstGeom prst="rect">
             <a:avLst/>
@@ -17287,21 +17246,67 @@
                 </a:solidFill>
                 <a:latin typeface="Arial"/>
               </a:rPr>
-              <a:t>bad (n=17)  median=0.159</a:t>
+              <a:t>bad (n=17)  med=0.16</a:t>
             </a:r>
           </a:p>
         </p:txBody>
       </p:sp>
       <p:sp>
         <p:nvSpPr>
-          <p:cNvPr id="68" name="TextBox 67"/>
+          <p:cNvPr id="68" name="Rectangle 67"/>
+          <p:cNvSpPr/>
+          <p:nvPr/>
+        </p:nvSpPr>
+        <p:spPr>
+          <a:xfrm>
+            <a:off x="4937760" y="868680"/>
+            <a:ext cx="2286000" cy="274320"/>
+          </a:xfrm>
+          <a:prstGeom prst="rect">
+            <a:avLst/>
+          </a:prstGeom>
+          <a:solidFill>
+            <a:srgbClr val="F0F0F0"/>
+          </a:solidFill>
+          <a:ln w="10160">
+            <a:solidFill>
+              <a:srgbClr val="222222"/>
+            </a:solidFill>
+          </a:ln>
+          <a:effectLst/>
+        </p:spPr>
+        <p:style>
+          <a:lnRef idx="1">
+            <a:schemeClr val="accent1"/>
+          </a:lnRef>
+          <a:fillRef idx="3">
+            <a:schemeClr val="accent1"/>
+          </a:fillRef>
+          <a:effectRef idx="2">
+            <a:schemeClr val="accent1"/>
+          </a:effectRef>
+          <a:fontRef idx="minor">
+            <a:schemeClr val="lt1"/>
+          </a:fontRef>
+        </p:style>
+        <p:txBody>
+          <a:bodyPr rtlCol="0" anchor="ctr"/>
+          <a:lstStyle/>
+          <a:p>
+            <a:pPr algn="ctr"/>
+          </a:p>
+        </p:txBody>
+      </p:sp>
+      <p:sp>
+        <p:nvSpPr>
+          <p:cNvPr id="69" name="TextBox 68"/>
           <p:cNvSpPr txBox="1"/>
           <p:nvPr/>
         </p:nvSpPr>
         <p:spPr>
           <a:xfrm>
-            <a:off x="3657600" y="822960"/>
-            <a:ext cx="4572000" cy="182880"/>
+            <a:off x="4937760" y="868680"/>
+            <a:ext cx="2286000" cy="274320"/>
           </a:xfrm>
           <a:prstGeom prst="rect">
             <a:avLst/>
@@ -17317,13 +17322,13 @@
           <a:p>
             <a:pPr algn="ctr"/>
             <a:r>
-              <a:rPr sz="1000" b="0" i="1">
+              <a:rPr sz="1000" b="1" i="0">
                 <a:solidFill>
                   <a:srgbClr val="222222"/>
                 </a:solidFill>
                 <a:latin typeface="Arial"/>
               </a:rPr>
-              <a:t>Mann–Whitney P = 0.908 — CIN does not distinguish groups</a:t>
+              <a:t>Mann–Whitney P = 0.908</a:t>
             </a:r>
           </a:p>
         </p:txBody>
